--- a/documentation/Fake_Review_Detection_Presentation.pptx
+++ b/documentation/Fake_Review_Detection_Presentation.pptx
@@ -5,7 +5,7 @@
     <p:sldMasterId id="2147483707" r:id="rId1"/>
   </p:sldMasterIdLst>
   <p:notesMasterIdLst>
-    <p:notesMasterId r:id="rId22"/>
+    <p:notesMasterId r:id="rId24"/>
   </p:notesMasterIdLst>
   <p:sldIdLst>
     <p:sldId id="256" r:id="rId2"/>
@@ -15,19 +15,21 @@
     <p:sldId id="258" r:id="rId6"/>
     <p:sldId id="259" r:id="rId7"/>
     <p:sldId id="260" r:id="rId8"/>
-    <p:sldId id="273" r:id="rId9"/>
-    <p:sldId id="261" r:id="rId10"/>
-    <p:sldId id="264" r:id="rId11"/>
-    <p:sldId id="265" r:id="rId12"/>
-    <p:sldId id="266" r:id="rId13"/>
-    <p:sldId id="267" r:id="rId14"/>
-    <p:sldId id="274" r:id="rId15"/>
-    <p:sldId id="268" r:id="rId16"/>
-    <p:sldId id="269" r:id="rId17"/>
-    <p:sldId id="275" r:id="rId18"/>
-    <p:sldId id="270" r:id="rId19"/>
-    <p:sldId id="276" r:id="rId20"/>
-    <p:sldId id="277" r:id="rId21"/>
+    <p:sldId id="261" r:id="rId9"/>
+    <p:sldId id="262" r:id="rId10"/>
+    <p:sldId id="273" r:id="rId11"/>
+    <p:sldId id="263" r:id="rId12"/>
+    <p:sldId id="264" r:id="rId13"/>
+    <p:sldId id="265" r:id="rId14"/>
+    <p:sldId id="266" r:id="rId15"/>
+    <p:sldId id="267" r:id="rId16"/>
+    <p:sldId id="274" r:id="rId17"/>
+    <p:sldId id="268" r:id="rId18"/>
+    <p:sldId id="269" r:id="rId19"/>
+    <p:sldId id="275" r:id="rId20"/>
+    <p:sldId id="270" r:id="rId21"/>
+    <p:sldId id="276" r:id="rId22"/>
+    <p:sldId id="277" r:id="rId23"/>
   </p:sldIdLst>
   <p:sldSz cx="9144000" cy="6858000" type="screen4x3"/>
   <p:notesSz cx="6858000" cy="9144000"/>
@@ -644,7 +646,7 @@
           <a:p>
             <a:fld id="{D800F3DB-B28D-42F6-9A26-10DBAC4BEA59}" type="slidenum">
               <a:rPr lang="en-US" smtClean="0"/>
-              <a:t>11</a:t>
+              <a:t>13</a:t>
             </a:fld>
             <a:endParaRPr lang="en-US"/>
           </a:p>
@@ -14138,10 +14140,10 @@
           <a:lstStyle/>
           <a:p>
             <a:r>
-              <a:rPr lang="en-US" dirty="0"/>
-              <a:t>Behavioral Features</a:t>
-            </a:r>
-            <a:endParaRPr dirty="0"/>
+              <a:rPr lang="en-US" dirty="0" smtClean="0"/>
+              <a:t>Textual Features</a:t>
+            </a:r>
+            <a:endParaRPr lang="en-US" dirty="0"/>
           </a:p>
         </p:txBody>
       </p:sp>
@@ -14157,14 +14159,12 @@
         </p:nvSpPr>
         <p:spPr>
           <a:xfrm>
-            <a:off x="554183" y="2489200"/>
-            <a:ext cx="8109526" cy="3530600"/>
+            <a:off x="554182" y="2489200"/>
+            <a:ext cx="8091054" cy="3530600"/>
           </a:xfrm>
         </p:spPr>
         <p:txBody>
-          <a:bodyPr>
-            <a:normAutofit/>
-          </a:bodyPr>
+          <a:bodyPr/>
           <a:lstStyle/>
           <a:p>
             <a:r>
@@ -14172,14 +14172,14 @@
                 <a:latin typeface="Arial" panose="020B0604020202020204" pitchFamily="34" charset="0"/>
                 <a:cs typeface="Arial" panose="020B0604020202020204" pitchFamily="34" charset="0"/>
               </a:rPr>
-              <a:t>Review Frequency</a:t>
+              <a:t>Word Count</a:t>
             </a:r>
             <a:r>
               <a:rPr lang="en-US" dirty="0">
                 <a:latin typeface="Arial" panose="020B0604020202020204" pitchFamily="34" charset="0"/>
                 <a:cs typeface="Arial" panose="020B0604020202020204" pitchFamily="34" charset="0"/>
               </a:rPr>
-              <a:t> – Detects users posting many reviews in a short time </a:t>
+              <a:t> – Measures length of the review </a:t>
             </a:r>
           </a:p>
           <a:p>
@@ -14188,14 +14188,14 @@
                 <a:latin typeface="Arial" panose="020B0604020202020204" pitchFamily="34" charset="0"/>
                 <a:cs typeface="Arial" panose="020B0604020202020204" pitchFamily="34" charset="0"/>
               </a:rPr>
-              <a:t>Rating Pattern</a:t>
+              <a:t>N-grams</a:t>
             </a:r>
             <a:r>
               <a:rPr lang="en-US" dirty="0">
                 <a:latin typeface="Arial" panose="020B0604020202020204" pitchFamily="34" charset="0"/>
                 <a:cs typeface="Arial" panose="020B0604020202020204" pitchFamily="34" charset="0"/>
               </a:rPr>
-              <a:t> – Identifies users giving mostly extreme ratings </a:t>
+              <a:t> – Captures sequences of words and writing patterns </a:t>
             </a:r>
           </a:p>
           <a:p>
@@ -14204,47 +14204,47 @@
                 <a:latin typeface="Arial" panose="020B0604020202020204" pitchFamily="34" charset="0"/>
                 <a:cs typeface="Arial" panose="020B0604020202020204" pitchFamily="34" charset="0"/>
               </a:rPr>
-              <a:t>Duplicate Reviews</a:t>
+              <a:t>TF-IDF</a:t>
             </a:r>
             <a:r>
               <a:rPr lang="en-US" dirty="0">
                 <a:latin typeface="Arial" panose="020B0604020202020204" pitchFamily="34" charset="0"/>
                 <a:cs typeface="Arial" panose="020B0604020202020204" pitchFamily="34" charset="0"/>
               </a:rPr>
-              <a:t> – Detects repeated or similar content </a:t>
-            </a:r>
-          </a:p>
-          <a:p>
-            <a:r>
-              <a:rPr lang="en-US" b="1" dirty="0">
-                <a:latin typeface="Arial" panose="020B0604020202020204" pitchFamily="34" charset="0"/>
-                <a:cs typeface="Arial" panose="020B0604020202020204" pitchFamily="34" charset="0"/>
-              </a:rPr>
-              <a:t>Readability Score</a:t>
+              <a:t> – Converts text into numerical form based on word importance </a:t>
+            </a:r>
+            <a:endParaRPr lang="en-US" dirty="0" smtClean="0">
+              <a:latin typeface="Arial" panose="020B0604020202020204" pitchFamily="34" charset="0"/>
+              <a:cs typeface="Arial" panose="020B0604020202020204" pitchFamily="34" charset="0"/>
+            </a:endParaRPr>
+          </a:p>
+          <a:p>
+            <a:pPr marL="0" indent="0">
+              <a:buNone/>
+            </a:pPr>
+            <a:r>
+              <a:rPr lang="en-US" dirty="0" smtClean="0">
+                <a:latin typeface="Arial" panose="020B0604020202020204" pitchFamily="34" charset="0"/>
+                <a:cs typeface="Arial" panose="020B0604020202020204" pitchFamily="34" charset="0"/>
+              </a:rPr>
+              <a:t>These </a:t>
             </a:r>
             <a:r>
               <a:rPr lang="en-US" dirty="0">
                 <a:latin typeface="Arial" panose="020B0604020202020204" pitchFamily="34" charset="0"/>
                 <a:cs typeface="Arial" panose="020B0604020202020204" pitchFamily="34" charset="0"/>
               </a:rPr>
-              <a:t> – Identifies unnatural or bot-like text </a:t>
-            </a:r>
-          </a:p>
-          <a:p>
-            <a:pPr marL="0" indent="0">
-              <a:buNone/>
-            </a:pPr>
-            <a:r>
-              <a:rPr lang="en-US" dirty="0">
-                <a:latin typeface="Arial" panose="020B0604020202020204" pitchFamily="34" charset="0"/>
-                <a:cs typeface="Arial" panose="020B0604020202020204" pitchFamily="34" charset="0"/>
-              </a:rPr>
-              <a:t>Behavioral features provide strong indicators of suspicious activity and significantly improve detection accuracy.</a:t>
+              <a:t>features help in identifying patterns such as repetitive phrases, exaggerated language, and unnatural writing styles commonly found in fake reviews.</a:t>
             </a:r>
           </a:p>
         </p:txBody>
       </p:sp>
     </p:spTree>
+    <p:extLst>
+      <p:ext uri="{BB962C8B-B14F-4D97-AF65-F5344CB8AC3E}">
+        <p14:creationId xmlns:p14="http://schemas.microsoft.com/office/powerpoint/2010/main" val="7445872"/>
+      </p:ext>
+    </p:extLst>
   </p:cSld>
   <p:clrMapOvr>
     <a:masterClrMapping/>
@@ -14285,8 +14285,10 @@
           <a:lstStyle/>
           <a:p>
             <a:r>
-              <a:t>Machine Learning Models</a:t>
-            </a:r>
+              <a:rPr lang="en-US" dirty="0"/>
+              <a:t>Sentiment Features</a:t>
+            </a:r>
+            <a:endParaRPr dirty="0"/>
           </a:p>
         </p:txBody>
       </p:sp>
@@ -14302,8 +14304,8 @@
         </p:nvSpPr>
         <p:spPr>
           <a:xfrm>
-            <a:off x="526473" y="2489200"/>
-            <a:ext cx="8081817" cy="3530600"/>
+            <a:off x="544945" y="2489200"/>
+            <a:ext cx="8081819" cy="3530600"/>
           </a:xfrm>
         </p:spPr>
         <p:txBody>
@@ -14316,14 +14318,14 @@
                 <a:latin typeface="Arial" panose="020B0604020202020204" pitchFamily="34" charset="0"/>
                 <a:cs typeface="Arial" panose="020B0604020202020204" pitchFamily="34" charset="0"/>
               </a:rPr>
-              <a:t>Logistic Regression</a:t>
+              <a:t>Polarity Score</a:t>
             </a:r>
             <a:r>
               <a:rPr lang="en-US" dirty="0">
                 <a:latin typeface="Arial" panose="020B0604020202020204" pitchFamily="34" charset="0"/>
                 <a:cs typeface="Arial" panose="020B0604020202020204" pitchFamily="34" charset="0"/>
               </a:rPr>
-              <a:t> – Simple and effective baseline model </a:t>
+              <a:t> – Determines whether sentiment is positive, negative, or neutral </a:t>
             </a:r>
           </a:p>
           <a:p>
@@ -14333,31 +14335,40 @@
                 <a:latin typeface="Arial" panose="020B0604020202020204" pitchFamily="34" charset="0"/>
                 <a:cs typeface="Arial" panose="020B0604020202020204" pitchFamily="34" charset="0"/>
               </a:rPr>
-              <a:t>Support Vector Machine (SVM)</a:t>
+              <a:t>Subjectivity Score</a:t>
             </a:r>
             <a:r>
               <a:rPr lang="en-US" dirty="0">
                 <a:latin typeface="Arial" panose="020B0604020202020204" pitchFamily="34" charset="0"/>
                 <a:cs typeface="Arial" panose="020B0604020202020204" pitchFamily="34" charset="0"/>
               </a:rPr>
-              <a:t> – Handles high-dimensional text data efficiently </a:t>
-            </a:r>
-          </a:p>
-          <a:p>
-            <a:pPr algn="just"/>
+              <a:t> – Measures whether the text is opinion-based or factual </a:t>
+            </a:r>
+          </a:p>
+          <a:p>
+            <a:pPr marL="0" indent="0" algn="just">
+              <a:buNone/>
+            </a:pPr>
+            <a:r>
+              <a:rPr lang="en-US" dirty="0">
+                <a:latin typeface="Arial" panose="020B0604020202020204" pitchFamily="34" charset="0"/>
+                <a:cs typeface="Arial" panose="020B0604020202020204" pitchFamily="34" charset="0"/>
+              </a:rPr>
+              <a:t>Fake reviews often exhibit </a:t>
+            </a:r>
             <a:r>
               <a:rPr lang="en-US" b="1" dirty="0">
                 <a:latin typeface="Arial" panose="020B0604020202020204" pitchFamily="34" charset="0"/>
                 <a:cs typeface="Arial" panose="020B0604020202020204" pitchFamily="34" charset="0"/>
               </a:rPr>
-              <a:t>Random Forest</a:t>
+              <a:t>extreme sentiment</a:t>
             </a:r>
             <a:r>
               <a:rPr lang="en-US" dirty="0">
                 <a:latin typeface="Arial" panose="020B0604020202020204" pitchFamily="34" charset="0"/>
                 <a:cs typeface="Arial" panose="020B0604020202020204" pitchFamily="34" charset="0"/>
               </a:rPr>
-              <a:t> – Ensemble model that improves accuracy and reduces overfitting </a:t>
+              <a:t>, such as overly positive or overly negative opinions.</a:t>
             </a:r>
           </a:p>
           <a:p>
@@ -14369,7 +14380,21 @@
                 <a:latin typeface="Arial" panose="020B0604020202020204" pitchFamily="34" charset="0"/>
                 <a:cs typeface="Arial" panose="020B0604020202020204" pitchFamily="34" charset="0"/>
               </a:rPr>
-              <a:t>These models are trained on extracted features and used to classify reviews as fake or genuine.</a:t>
+              <a:t>Sentiment analysis is performed using the </a:t>
+            </a:r>
+            <a:r>
+              <a:rPr lang="en-US" b="1" dirty="0">
+                <a:latin typeface="Arial" panose="020B0604020202020204" pitchFamily="34" charset="0"/>
+                <a:cs typeface="Arial" panose="020B0604020202020204" pitchFamily="34" charset="0"/>
+              </a:rPr>
+              <a:t>VADER model</a:t>
+            </a:r>
+            <a:r>
+              <a:rPr lang="en-US" dirty="0">
+                <a:latin typeface="Arial" panose="020B0604020202020204" pitchFamily="34" charset="0"/>
+                <a:cs typeface="Arial" panose="020B0604020202020204" pitchFamily="34" charset="0"/>
+              </a:rPr>
+              <a:t>, which provides fine-grained sentiment scores.</a:t>
             </a:r>
           </a:p>
         </p:txBody>
@@ -14415,16 +14440,8 @@
           <a:lstStyle/>
           <a:p>
             <a:r>
-              <a:rPr dirty="0"/>
-              <a:t>Deep Learning </a:t>
-            </a:r>
-            <a:r>
-              <a:rPr dirty="0" smtClean="0"/>
-              <a:t>Model</a:t>
-            </a:r>
-            <a:r>
               <a:rPr lang="en-US" dirty="0"/>
-              <a:t>– LSTM</a:t>
+              <a:t>Behavioral Features</a:t>
             </a:r>
             <a:endParaRPr dirty="0"/>
           </a:p>
@@ -14443,54 +14460,80 @@
         <p:spPr>
           <a:xfrm>
             <a:off x="554183" y="2489200"/>
-            <a:ext cx="8155708" cy="3530600"/>
+            <a:ext cx="8109526" cy="3530600"/>
           </a:xfrm>
         </p:spPr>
         <p:txBody>
-          <a:bodyPr/>
+          <a:bodyPr>
+            <a:normAutofit/>
+          </a:bodyPr>
           <a:lstStyle/>
           <a:p>
-            <a:pPr algn="just"/>
+            <a:r>
+              <a:rPr lang="en-US" b="1" dirty="0">
+                <a:latin typeface="Arial" panose="020B0604020202020204" pitchFamily="34" charset="0"/>
+                <a:cs typeface="Arial" panose="020B0604020202020204" pitchFamily="34" charset="0"/>
+              </a:rPr>
+              <a:t>Review Frequency</a:t>
+            </a:r>
             <a:r>
               <a:rPr lang="en-US" dirty="0">
                 <a:latin typeface="Arial" panose="020B0604020202020204" pitchFamily="34" charset="0"/>
                 <a:cs typeface="Arial" panose="020B0604020202020204" pitchFamily="34" charset="0"/>
               </a:rPr>
-              <a:t>Uses sequential processing of text data </a:t>
-            </a:r>
-          </a:p>
-          <a:p>
-            <a:pPr algn="just"/>
+              <a:t> – Detects users posting many reviews in a short time </a:t>
+            </a:r>
+          </a:p>
+          <a:p>
+            <a:r>
+              <a:rPr lang="en-US" b="1" dirty="0">
+                <a:latin typeface="Arial" panose="020B0604020202020204" pitchFamily="34" charset="0"/>
+                <a:cs typeface="Arial" panose="020B0604020202020204" pitchFamily="34" charset="0"/>
+              </a:rPr>
+              <a:t>Rating Pattern</a:t>
+            </a:r>
             <a:r>
               <a:rPr lang="en-US" dirty="0">
                 <a:latin typeface="Arial" panose="020B0604020202020204" pitchFamily="34" charset="0"/>
                 <a:cs typeface="Arial" panose="020B0604020202020204" pitchFamily="34" charset="0"/>
               </a:rPr>
-              <a:t>Pipeline: Tokenization → Padding → Embedding → LSTM layers </a:t>
-            </a:r>
-          </a:p>
-          <a:p>
-            <a:pPr algn="just"/>
+              <a:t> – Identifies users giving mostly extreme ratings </a:t>
+            </a:r>
+          </a:p>
+          <a:p>
+            <a:r>
+              <a:rPr lang="en-US" b="1" dirty="0">
+                <a:latin typeface="Arial" panose="020B0604020202020204" pitchFamily="34" charset="0"/>
+                <a:cs typeface="Arial" panose="020B0604020202020204" pitchFamily="34" charset="0"/>
+              </a:rPr>
+              <a:t>Duplicate Reviews</a:t>
+            </a:r>
             <a:r>
               <a:rPr lang="en-US" dirty="0">
                 <a:latin typeface="Arial" panose="020B0604020202020204" pitchFamily="34" charset="0"/>
                 <a:cs typeface="Arial" panose="020B0604020202020204" pitchFamily="34" charset="0"/>
               </a:rPr>
-              <a:t>Captures contextual relationships and long-term dependencies </a:t>
-            </a:r>
-          </a:p>
-          <a:p>
-            <a:pPr algn="just"/>
+              <a:t> – Detects repeated or similar content </a:t>
+            </a:r>
+          </a:p>
+          <a:p>
+            <a:r>
+              <a:rPr lang="en-US" b="1" dirty="0">
+                <a:latin typeface="Arial" panose="020B0604020202020204" pitchFamily="34" charset="0"/>
+                <a:cs typeface="Arial" panose="020B0604020202020204" pitchFamily="34" charset="0"/>
+              </a:rPr>
+              <a:t>Readability Score</a:t>
+            </a:r>
             <a:r>
               <a:rPr lang="en-US" dirty="0">
                 <a:latin typeface="Arial" panose="020B0604020202020204" pitchFamily="34" charset="0"/>
                 <a:cs typeface="Arial" panose="020B0604020202020204" pitchFamily="34" charset="0"/>
               </a:rPr>
-              <a:t>Performs better on complex and long reviews </a:t>
-            </a:r>
-          </a:p>
-          <a:p>
-            <a:pPr marL="0" indent="0" algn="just">
+              <a:t> – Identifies unnatural or bot-like text </a:t>
+            </a:r>
+          </a:p>
+          <a:p>
+            <a:pPr marL="0" indent="0">
               <a:buNone/>
             </a:pPr>
             <a:r>
@@ -14498,7 +14541,7 @@
                 <a:latin typeface="Arial" panose="020B0604020202020204" pitchFamily="34" charset="0"/>
                 <a:cs typeface="Arial" panose="020B0604020202020204" pitchFamily="34" charset="0"/>
               </a:rPr>
-              <a:t>LSTM complements machine learning models by improving detection of subtle patterns.</a:t>
+              <a:t>Behavioral features provide strong indicators of suspicious activity and significantly improve detection accuracy.</a:t>
             </a:r>
           </a:p>
         </p:txBody>
@@ -14544,7 +14587,7 @@
           <a:lstStyle/>
           <a:p>
             <a:r>
-              <a:t>Explainable AI</a:t>
+              <a:t>Machine Learning Models</a:t>
             </a:r>
           </a:p>
         </p:txBody>
@@ -14562,7 +14605,7 @@
         <p:spPr>
           <a:xfrm>
             <a:off x="526473" y="2489200"/>
-            <a:ext cx="8118763" cy="3530600"/>
+            <a:ext cx="8081817" cy="3530600"/>
           </a:xfrm>
         </p:spPr>
         <p:txBody>
@@ -14571,74 +14614,64 @@
           <a:p>
             <a:pPr algn="just"/>
             <a:r>
+              <a:rPr lang="en-US" b="1" dirty="0">
+                <a:latin typeface="Arial" panose="020B0604020202020204" pitchFamily="34" charset="0"/>
+                <a:cs typeface="Arial" panose="020B0604020202020204" pitchFamily="34" charset="0"/>
+              </a:rPr>
+              <a:t>Logistic Regression</a:t>
+            </a:r>
+            <a:r>
               <a:rPr lang="en-US" dirty="0">
                 <a:latin typeface="Arial" panose="020B0604020202020204" pitchFamily="34" charset="0"/>
                 <a:cs typeface="Arial" panose="020B0604020202020204" pitchFamily="34" charset="0"/>
               </a:rPr>
-              <a:t>SHAP (</a:t>
-            </a:r>
-            <a:r>
-              <a:rPr lang="en-US" dirty="0" err="1">
-                <a:latin typeface="Arial" panose="020B0604020202020204" pitchFamily="34" charset="0"/>
-                <a:cs typeface="Arial" panose="020B0604020202020204" pitchFamily="34" charset="0"/>
-              </a:rPr>
-              <a:t>SHapley</a:t>
+              <a:t> – Simple and effective baseline model </a:t>
+            </a:r>
+          </a:p>
+          <a:p>
+            <a:pPr algn="just"/>
+            <a:r>
+              <a:rPr lang="en-US" b="1" dirty="0">
+                <a:latin typeface="Arial" panose="020B0604020202020204" pitchFamily="34" charset="0"/>
+                <a:cs typeface="Arial" panose="020B0604020202020204" pitchFamily="34" charset="0"/>
+              </a:rPr>
+              <a:t>Support Vector Machine (SVM)</a:t>
             </a:r>
             <a:r>
               <a:rPr lang="en-US" dirty="0">
                 <a:latin typeface="Arial" panose="020B0604020202020204" pitchFamily="34" charset="0"/>
                 <a:cs typeface="Arial" panose="020B0604020202020204" pitchFamily="34" charset="0"/>
               </a:rPr>
-              <a:t> Additive Explanations) is used for model interpretation </a:t>
+              <a:t> – Handles high-dimensional text data efficiently </a:t>
             </a:r>
           </a:p>
           <a:p>
             <a:pPr algn="just"/>
             <a:r>
+              <a:rPr lang="en-US" b="1" dirty="0">
+                <a:latin typeface="Arial" panose="020B0604020202020204" pitchFamily="34" charset="0"/>
+                <a:cs typeface="Arial" panose="020B0604020202020204" pitchFamily="34" charset="0"/>
+              </a:rPr>
+              <a:t>Random Forest</a:t>
+            </a:r>
+            <a:r>
               <a:rPr lang="en-US" dirty="0">
                 <a:latin typeface="Arial" panose="020B0604020202020204" pitchFamily="34" charset="0"/>
                 <a:cs typeface="Arial" panose="020B0604020202020204" pitchFamily="34" charset="0"/>
               </a:rPr>
-              <a:t>Identifies important words/features influencing predictions </a:t>
-            </a:r>
-          </a:p>
-          <a:p>
-            <a:pPr algn="just"/>
+              <a:t> – Ensemble model that improves accuracy and reduces overfitting </a:t>
+            </a:r>
+          </a:p>
+          <a:p>
+            <a:pPr marL="0" indent="0" algn="just">
+              <a:buNone/>
+            </a:pPr>
             <a:r>
               <a:rPr lang="en-US" dirty="0">
                 <a:latin typeface="Arial" panose="020B0604020202020204" pitchFamily="34" charset="0"/>
                 <a:cs typeface="Arial" panose="020B0604020202020204" pitchFamily="34" charset="0"/>
               </a:rPr>
-              <a:t>Provides transparency and improves trust in the system </a:t>
-            </a:r>
-          </a:p>
-          <a:p>
-            <a:pPr algn="just"/>
-            <a:r>
-              <a:rPr lang="en-US" dirty="0">
-                <a:latin typeface="Arial" panose="020B0604020202020204" pitchFamily="34" charset="0"/>
-                <a:cs typeface="Arial" panose="020B0604020202020204" pitchFamily="34" charset="0"/>
-              </a:rPr>
-              <a:t>Helps users understand why a review is classified as fake or genuine </a:t>
-            </a:r>
-          </a:p>
-          <a:p>
-            <a:pPr marL="0" indent="0" algn="just">
-              <a:buNone/>
-            </a:pPr>
-            <a:r>
-              <a:rPr lang="en-US" dirty="0" err="1">
-                <a:latin typeface="Arial" panose="020B0604020202020204" pitchFamily="34" charset="0"/>
-                <a:cs typeface="Arial" panose="020B0604020202020204" pitchFamily="34" charset="0"/>
-              </a:rPr>
-              <a:t>Explainability</a:t>
-            </a:r>
-            <a:r>
-              <a:rPr lang="en-US" dirty="0">
-                <a:latin typeface="Arial" panose="020B0604020202020204" pitchFamily="34" charset="0"/>
-                <a:cs typeface="Arial" panose="020B0604020202020204" pitchFamily="34" charset="0"/>
-              </a:rPr>
-              <a:t> is essential for real-world AI applications.</a:t>
+              <a:t>These models are trained on extracted features and used to classify reviews as fake or genuine.</a:t>
             </a:r>
           </a:p>
         </p:txBody>
@@ -14684,9 +14717,18 @@
           <a:lstStyle/>
           <a:p>
             <a:r>
+              <a:rPr dirty="0"/>
+              <a:t>Deep Learning </a:t>
+            </a:r>
+            <a:r>
+              <a:rPr dirty="0" smtClean="0"/>
+              <a:t>Model</a:t>
+            </a:r>
+            <a:r>
               <a:rPr lang="en-US" dirty="0"/>
-              <a:t>Dataset Challenges</a:t>
-            </a:r>
+              <a:t>– LSTM</a:t>
+            </a:r>
+            <a:endParaRPr dirty="0"/>
           </a:p>
         </p:txBody>
       </p:sp>
@@ -14702,8 +14744,8 @@
         </p:nvSpPr>
         <p:spPr>
           <a:xfrm>
-            <a:off x="581891" y="2489200"/>
-            <a:ext cx="8063345" cy="3530600"/>
+            <a:off x="554183" y="2489200"/>
+            <a:ext cx="8155708" cy="3530600"/>
           </a:xfrm>
         </p:spPr>
         <p:txBody>
@@ -14712,53 +14754,41 @@
           <a:p>
             <a:pPr algn="just"/>
             <a:r>
-              <a:rPr lang="en-US" b="1" dirty="0"/>
-              <a:t>Class Imbalance</a:t>
-            </a:r>
-            <a:r>
-              <a:rPr lang="en-US" dirty="0"/>
-              <a:t> – Genuine reviews are usually more than fake ones </a:t>
+              <a:rPr lang="en-US" dirty="0">
+                <a:latin typeface="Arial" panose="020B0604020202020204" pitchFamily="34" charset="0"/>
+                <a:cs typeface="Arial" panose="020B0604020202020204" pitchFamily="34" charset="0"/>
+              </a:rPr>
+              <a:t>Uses sequential processing of text data </a:t>
             </a:r>
           </a:p>
           <a:p>
             <a:pPr algn="just"/>
             <a:r>
-              <a:rPr lang="en-US" b="1" dirty="0"/>
-              <a:t>Noisy Text Data</a:t>
-            </a:r>
-            <a:r>
-              <a:rPr lang="en-US" dirty="0"/>
-              <a:t> – Includes </a:t>
-            </a:r>
-            <a:r>
-              <a:rPr lang="en-US" dirty="0" err="1"/>
-              <a:t>stopwords</a:t>
-            </a:r>
-            <a:r>
-              <a:rPr lang="en-US" dirty="0"/>
-              <a:t>, punctuation, and irrelevant words </a:t>
+              <a:rPr lang="en-US" dirty="0">
+                <a:latin typeface="Arial" panose="020B0604020202020204" pitchFamily="34" charset="0"/>
+                <a:cs typeface="Arial" panose="020B0604020202020204" pitchFamily="34" charset="0"/>
+              </a:rPr>
+              <a:t>Pipeline: Tokenization → Padding → Embedding → LSTM layers </a:t>
             </a:r>
           </a:p>
           <a:p>
             <a:pPr algn="just"/>
             <a:r>
-              <a:rPr lang="en-US" b="1" dirty="0"/>
-              <a:t>Missing Values</a:t>
-            </a:r>
-            <a:r>
-              <a:rPr lang="en-US" dirty="0"/>
-              <a:t> – Some fields may be incomplete </a:t>
+              <a:rPr lang="en-US" dirty="0">
+                <a:latin typeface="Arial" panose="020B0604020202020204" pitchFamily="34" charset="0"/>
+                <a:cs typeface="Arial" panose="020B0604020202020204" pitchFamily="34" charset="0"/>
+              </a:rPr>
+              <a:t>Captures contextual relationships and long-term dependencies </a:t>
             </a:r>
           </a:p>
           <a:p>
             <a:pPr algn="just"/>
             <a:r>
-              <a:rPr lang="en-US" b="1" dirty="0"/>
-              <a:t>Variability</a:t>
-            </a:r>
-            <a:r>
-              <a:rPr lang="en-US" dirty="0"/>
-              <a:t> – Different writing styles across users </a:t>
+              <a:rPr lang="en-US" dirty="0">
+                <a:latin typeface="Arial" panose="020B0604020202020204" pitchFamily="34" charset="0"/>
+                <a:cs typeface="Arial" panose="020B0604020202020204" pitchFamily="34" charset="0"/>
+              </a:rPr>
+              <a:t>Performs better on complex and long reviews </a:t>
             </a:r>
           </a:p>
           <a:p>
@@ -14766,18 +14796,16 @@
               <a:buNone/>
             </a:pPr>
             <a:r>
-              <a:rPr lang="en-US" dirty="0"/>
-              <a:t>These challenges require proper preprocessing and feature engineering to ensure model accuracy.</a:t>
+              <a:rPr lang="en-US" dirty="0">
+                <a:latin typeface="Arial" panose="020B0604020202020204" pitchFamily="34" charset="0"/>
+                <a:cs typeface="Arial" panose="020B0604020202020204" pitchFamily="34" charset="0"/>
+              </a:rPr>
+              <a:t>LSTM complements machine learning models by improving detection of subtle patterns.</a:t>
             </a:r>
           </a:p>
         </p:txBody>
       </p:sp>
     </p:spTree>
-    <p:extLst>
-      <p:ext uri="{BB962C8B-B14F-4D97-AF65-F5344CB8AC3E}">
-        <p14:creationId xmlns:p14="http://schemas.microsoft.com/office/powerpoint/2010/main" val="490314088"/>
-      </p:ext>
-    </p:extLst>
   </p:cSld>
   <p:clrMapOvr>
     <a:masterClrMapping/>
@@ -14818,6 +14846,280 @@
           <a:lstStyle/>
           <a:p>
             <a:r>
+              <a:t>Explainable AI</a:t>
+            </a:r>
+          </a:p>
+        </p:txBody>
+      </p:sp>
+      <p:sp>
+        <p:nvSpPr>
+          <p:cNvPr id="3" name="Content Placeholder 2"/>
+          <p:cNvSpPr>
+            <a:spLocks noGrp="1"/>
+          </p:cNvSpPr>
+          <p:nvPr>
+            <p:ph idx="1"/>
+          </p:nvPr>
+        </p:nvSpPr>
+        <p:spPr>
+          <a:xfrm>
+            <a:off x="526473" y="2489200"/>
+            <a:ext cx="8118763" cy="3530600"/>
+          </a:xfrm>
+        </p:spPr>
+        <p:txBody>
+          <a:bodyPr/>
+          <a:lstStyle/>
+          <a:p>
+            <a:pPr algn="just"/>
+            <a:r>
+              <a:rPr lang="en-US" dirty="0">
+                <a:latin typeface="Arial" panose="020B0604020202020204" pitchFamily="34" charset="0"/>
+                <a:cs typeface="Arial" panose="020B0604020202020204" pitchFamily="34" charset="0"/>
+              </a:rPr>
+              <a:t>SHAP (</a:t>
+            </a:r>
+            <a:r>
+              <a:rPr lang="en-US" dirty="0" err="1">
+                <a:latin typeface="Arial" panose="020B0604020202020204" pitchFamily="34" charset="0"/>
+                <a:cs typeface="Arial" panose="020B0604020202020204" pitchFamily="34" charset="0"/>
+              </a:rPr>
+              <a:t>SHapley</a:t>
+            </a:r>
+            <a:r>
+              <a:rPr lang="en-US" dirty="0">
+                <a:latin typeface="Arial" panose="020B0604020202020204" pitchFamily="34" charset="0"/>
+                <a:cs typeface="Arial" panose="020B0604020202020204" pitchFamily="34" charset="0"/>
+              </a:rPr>
+              <a:t> Additive Explanations) is used for model interpretation </a:t>
+            </a:r>
+          </a:p>
+          <a:p>
+            <a:pPr algn="just"/>
+            <a:r>
+              <a:rPr lang="en-US" dirty="0">
+                <a:latin typeface="Arial" panose="020B0604020202020204" pitchFamily="34" charset="0"/>
+                <a:cs typeface="Arial" panose="020B0604020202020204" pitchFamily="34" charset="0"/>
+              </a:rPr>
+              <a:t>Identifies important words/features influencing predictions </a:t>
+            </a:r>
+          </a:p>
+          <a:p>
+            <a:pPr algn="just"/>
+            <a:r>
+              <a:rPr lang="en-US" dirty="0">
+                <a:latin typeface="Arial" panose="020B0604020202020204" pitchFamily="34" charset="0"/>
+                <a:cs typeface="Arial" panose="020B0604020202020204" pitchFamily="34" charset="0"/>
+              </a:rPr>
+              <a:t>Provides transparency and improves trust in the system </a:t>
+            </a:r>
+          </a:p>
+          <a:p>
+            <a:pPr algn="just"/>
+            <a:r>
+              <a:rPr lang="en-US" dirty="0">
+                <a:latin typeface="Arial" panose="020B0604020202020204" pitchFamily="34" charset="0"/>
+                <a:cs typeface="Arial" panose="020B0604020202020204" pitchFamily="34" charset="0"/>
+              </a:rPr>
+              <a:t>Helps users understand why a review is classified as fake or genuine </a:t>
+            </a:r>
+          </a:p>
+          <a:p>
+            <a:pPr marL="0" indent="0" algn="just">
+              <a:buNone/>
+            </a:pPr>
+            <a:r>
+              <a:rPr lang="en-US" dirty="0" err="1">
+                <a:latin typeface="Arial" panose="020B0604020202020204" pitchFamily="34" charset="0"/>
+                <a:cs typeface="Arial" panose="020B0604020202020204" pitchFamily="34" charset="0"/>
+              </a:rPr>
+              <a:t>Explainability</a:t>
+            </a:r>
+            <a:r>
+              <a:rPr lang="en-US" dirty="0">
+                <a:latin typeface="Arial" panose="020B0604020202020204" pitchFamily="34" charset="0"/>
+                <a:cs typeface="Arial" panose="020B0604020202020204" pitchFamily="34" charset="0"/>
+              </a:rPr>
+              <a:t> is essential for real-world AI applications.</a:t>
+            </a:r>
+          </a:p>
+        </p:txBody>
+      </p:sp>
+    </p:spTree>
+  </p:cSld>
+  <p:clrMapOvr>
+    <a:masterClrMapping/>
+  </p:clrMapOvr>
+</p:sld>
+</file>
+
+<file path=ppt/slides/slide16.xml><?xml version="1.0" encoding="utf-8"?>
+<p:sld xmlns:a="http://schemas.openxmlformats.org/drawingml/2006/main" xmlns:r="http://schemas.openxmlformats.org/officeDocument/2006/relationships" xmlns:p="http://schemas.openxmlformats.org/presentationml/2006/main">
+  <p:cSld>
+    <p:spTree>
+      <p:nvGrpSpPr>
+        <p:cNvPr id="1" name=""/>
+        <p:cNvGrpSpPr/>
+        <p:nvPr/>
+      </p:nvGrpSpPr>
+      <p:grpSpPr>
+        <a:xfrm>
+          <a:off x="0" y="0"/>
+          <a:ext cx="0" cy="0"/>
+          <a:chOff x="0" y="0"/>
+          <a:chExt cx="0" cy="0"/>
+        </a:xfrm>
+      </p:grpSpPr>
+      <p:sp>
+        <p:nvSpPr>
+          <p:cNvPr id="2" name="Title 1"/>
+          <p:cNvSpPr>
+            <a:spLocks noGrp="1"/>
+          </p:cNvSpPr>
+          <p:nvPr>
+            <p:ph type="title"/>
+          </p:nvPr>
+        </p:nvSpPr>
+        <p:spPr/>
+        <p:txBody>
+          <a:bodyPr/>
+          <a:lstStyle/>
+          <a:p>
+            <a:r>
+              <a:rPr lang="en-US" dirty="0"/>
+              <a:t>Dataset Challenges</a:t>
+            </a:r>
+          </a:p>
+        </p:txBody>
+      </p:sp>
+      <p:sp>
+        <p:nvSpPr>
+          <p:cNvPr id="3" name="Content Placeholder 2"/>
+          <p:cNvSpPr>
+            <a:spLocks noGrp="1"/>
+          </p:cNvSpPr>
+          <p:nvPr>
+            <p:ph idx="1"/>
+          </p:nvPr>
+        </p:nvSpPr>
+        <p:spPr>
+          <a:xfrm>
+            <a:off x="581891" y="2489200"/>
+            <a:ext cx="8063345" cy="3530600"/>
+          </a:xfrm>
+        </p:spPr>
+        <p:txBody>
+          <a:bodyPr/>
+          <a:lstStyle/>
+          <a:p>
+            <a:pPr algn="just"/>
+            <a:r>
+              <a:rPr lang="en-US" b="1" dirty="0"/>
+              <a:t>Class Imbalance</a:t>
+            </a:r>
+            <a:r>
+              <a:rPr lang="en-US" dirty="0"/>
+              <a:t> – Genuine reviews are usually more than fake ones </a:t>
+            </a:r>
+          </a:p>
+          <a:p>
+            <a:pPr algn="just"/>
+            <a:r>
+              <a:rPr lang="en-US" b="1" dirty="0"/>
+              <a:t>Noisy Text Data</a:t>
+            </a:r>
+            <a:r>
+              <a:rPr lang="en-US" dirty="0"/>
+              <a:t> – Includes </a:t>
+            </a:r>
+            <a:r>
+              <a:rPr lang="en-US" dirty="0" err="1"/>
+              <a:t>stopwords</a:t>
+            </a:r>
+            <a:r>
+              <a:rPr lang="en-US" dirty="0"/>
+              <a:t>, punctuation, and irrelevant words </a:t>
+            </a:r>
+          </a:p>
+          <a:p>
+            <a:pPr algn="just"/>
+            <a:r>
+              <a:rPr lang="en-US" b="1" dirty="0"/>
+              <a:t>Missing Values</a:t>
+            </a:r>
+            <a:r>
+              <a:rPr lang="en-US" dirty="0"/>
+              <a:t> – Some fields may be incomplete </a:t>
+            </a:r>
+          </a:p>
+          <a:p>
+            <a:pPr algn="just"/>
+            <a:r>
+              <a:rPr lang="en-US" b="1" dirty="0"/>
+              <a:t>Variability</a:t>
+            </a:r>
+            <a:r>
+              <a:rPr lang="en-US" dirty="0"/>
+              <a:t> – Different writing styles across users </a:t>
+            </a:r>
+          </a:p>
+          <a:p>
+            <a:pPr marL="0" indent="0" algn="just">
+              <a:buNone/>
+            </a:pPr>
+            <a:r>
+              <a:rPr lang="en-US" dirty="0"/>
+              <a:t>These challenges require proper preprocessing and feature engineering to ensure model accuracy.</a:t>
+            </a:r>
+          </a:p>
+        </p:txBody>
+      </p:sp>
+    </p:spTree>
+    <p:extLst>
+      <p:ext uri="{BB962C8B-B14F-4D97-AF65-F5344CB8AC3E}">
+        <p14:creationId xmlns:p14="http://schemas.microsoft.com/office/powerpoint/2010/main" val="490314088"/>
+      </p:ext>
+    </p:extLst>
+  </p:cSld>
+  <p:clrMapOvr>
+    <a:masterClrMapping/>
+  </p:clrMapOvr>
+</p:sld>
+</file>
+
+<file path=ppt/slides/slide17.xml><?xml version="1.0" encoding="utf-8"?>
+<p:sld xmlns:a="http://schemas.openxmlformats.org/drawingml/2006/main" xmlns:r="http://schemas.openxmlformats.org/officeDocument/2006/relationships" xmlns:p="http://schemas.openxmlformats.org/presentationml/2006/main">
+  <p:cSld>
+    <p:spTree>
+      <p:nvGrpSpPr>
+        <p:cNvPr id="1" name=""/>
+        <p:cNvGrpSpPr/>
+        <p:nvPr/>
+      </p:nvGrpSpPr>
+      <p:grpSpPr>
+        <a:xfrm>
+          <a:off x="0" y="0"/>
+          <a:ext cx="0" cy="0"/>
+          <a:chOff x="0" y="0"/>
+          <a:chExt cx="0" cy="0"/>
+        </a:xfrm>
+      </p:grpSpPr>
+      <p:sp>
+        <p:nvSpPr>
+          <p:cNvPr id="2" name="Title 1"/>
+          <p:cNvSpPr>
+            <a:spLocks noGrp="1"/>
+          </p:cNvSpPr>
+          <p:nvPr>
+            <p:ph type="title"/>
+          </p:nvPr>
+        </p:nvSpPr>
+        <p:spPr/>
+        <p:txBody>
+          <a:bodyPr/>
+          <a:lstStyle/>
+          <a:p>
+            <a:r>
               <a:t>Model Evaluation</a:t>
             </a:r>
           </a:p>
@@ -15033,7 +15335,7 @@
 </p:sld>
 </file>
 
-<file path=ppt/slides/slide16.xml><?xml version="1.0" encoding="utf-8"?>
+<file path=ppt/slides/slide18.xml><?xml version="1.0" encoding="utf-8"?>
 <p:sld xmlns:a="http://schemas.openxmlformats.org/drawingml/2006/main" xmlns:r="http://schemas.openxmlformats.org/officeDocument/2006/relationships" xmlns:p="http://schemas.openxmlformats.org/presentationml/2006/main">
   <p:cSld>
     <p:spTree>
@@ -15150,237 +15452,6 @@
 </p:sld>
 </file>
 
-<file path=ppt/slides/slide17.xml><?xml version="1.0" encoding="utf-8"?>
-<p:sld xmlns:a="http://schemas.openxmlformats.org/drawingml/2006/main" xmlns:r="http://schemas.openxmlformats.org/officeDocument/2006/relationships" xmlns:p="http://schemas.openxmlformats.org/presentationml/2006/main">
-  <p:cSld>
-    <p:spTree>
-      <p:nvGrpSpPr>
-        <p:cNvPr id="1" name=""/>
-        <p:cNvGrpSpPr/>
-        <p:nvPr/>
-      </p:nvGrpSpPr>
-      <p:grpSpPr>
-        <a:xfrm>
-          <a:off x="0" y="0"/>
-          <a:ext cx="0" cy="0"/>
-          <a:chOff x="0" y="0"/>
-          <a:chExt cx="0" cy="0"/>
-        </a:xfrm>
-      </p:grpSpPr>
-      <p:sp>
-        <p:nvSpPr>
-          <p:cNvPr id="2" name="Title 1"/>
-          <p:cNvSpPr>
-            <a:spLocks noGrp="1"/>
-          </p:cNvSpPr>
-          <p:nvPr>
-            <p:ph type="title"/>
-          </p:nvPr>
-        </p:nvSpPr>
-        <p:spPr/>
-        <p:txBody>
-          <a:bodyPr/>
-          <a:lstStyle/>
-          <a:p>
-            <a:r>
-              <a:rPr lang="en-US" dirty="0"/>
-              <a:t>Results &amp; Insights</a:t>
-            </a:r>
-          </a:p>
-        </p:txBody>
-      </p:sp>
-      <p:sp>
-        <p:nvSpPr>
-          <p:cNvPr id="3" name="Content Placeholder 2"/>
-          <p:cNvSpPr>
-            <a:spLocks noGrp="1"/>
-          </p:cNvSpPr>
-          <p:nvPr>
-            <p:ph idx="1"/>
-          </p:nvPr>
-        </p:nvSpPr>
-        <p:spPr>
-          <a:xfrm>
-            <a:off x="544945" y="2489200"/>
-            <a:ext cx="8118763" cy="3530600"/>
-          </a:xfrm>
-        </p:spPr>
-        <p:txBody>
-          <a:bodyPr>
-            <a:normAutofit/>
-          </a:bodyPr>
-          <a:lstStyle/>
-          <a:p>
-            <a:r>
-              <a:rPr lang="en-US" dirty="0">
-                <a:latin typeface="Arial" panose="020B0604020202020204" pitchFamily="34" charset="0"/>
-                <a:cs typeface="Arial" panose="020B0604020202020204" pitchFamily="34" charset="0"/>
-              </a:rPr>
-              <a:t>Accurate classification of fake and genuine reviews </a:t>
-            </a:r>
-          </a:p>
-          <a:p>
-            <a:r>
-              <a:rPr lang="en-US" dirty="0">
-                <a:latin typeface="Arial" panose="020B0604020202020204" pitchFamily="34" charset="0"/>
-                <a:cs typeface="Arial" panose="020B0604020202020204" pitchFamily="34" charset="0"/>
-              </a:rPr>
-              <a:t>Detection of patterns such as: </a:t>
-            </a:r>
-          </a:p>
-          <a:p>
-            <a:pPr lvl="1">
-              <a:buFont typeface="Wingdings" panose="05000000000000000000" pitchFamily="2" charset="2"/>
-              <a:buChar char="q"/>
-            </a:pPr>
-            <a:r>
-              <a:rPr lang="en-US" dirty="0">
-                <a:latin typeface="Arial" panose="020B0604020202020204" pitchFamily="34" charset="0"/>
-                <a:cs typeface="Arial" panose="020B0604020202020204" pitchFamily="34" charset="0"/>
-              </a:rPr>
-              <a:t>Repetitive and exaggerated language </a:t>
-            </a:r>
-          </a:p>
-          <a:p>
-            <a:pPr lvl="1">
-              <a:buFont typeface="Wingdings" panose="05000000000000000000" pitchFamily="2" charset="2"/>
-              <a:buChar char="q"/>
-            </a:pPr>
-            <a:r>
-              <a:rPr lang="en-US" dirty="0">
-                <a:latin typeface="Arial" panose="020B0604020202020204" pitchFamily="34" charset="0"/>
-                <a:cs typeface="Arial" panose="020B0604020202020204" pitchFamily="34" charset="0"/>
-              </a:rPr>
-              <a:t>Extreme sentiment behavior </a:t>
-            </a:r>
-          </a:p>
-          <a:p>
-            <a:r>
-              <a:rPr lang="en-US" dirty="0">
-                <a:latin typeface="Arial" panose="020B0604020202020204" pitchFamily="34" charset="0"/>
-                <a:cs typeface="Arial" panose="020B0604020202020204" pitchFamily="34" charset="0"/>
-              </a:rPr>
-              <a:t>Identification of suspicious users through behavioral analysis </a:t>
-            </a:r>
-          </a:p>
-          <a:p>
-            <a:r>
-              <a:rPr lang="en-US" dirty="0">
-                <a:latin typeface="Arial" panose="020B0604020202020204" pitchFamily="34" charset="0"/>
-                <a:cs typeface="Arial" panose="020B0604020202020204" pitchFamily="34" charset="0"/>
-              </a:rPr>
-              <a:t>Confidence score (Trust Gauge) based on model predictions </a:t>
-            </a:r>
-          </a:p>
-          <a:p>
-            <a:r>
-              <a:rPr lang="en-US" dirty="0">
-                <a:latin typeface="Arial" panose="020B0604020202020204" pitchFamily="34" charset="0"/>
-                <a:cs typeface="Arial" panose="020B0604020202020204" pitchFamily="34" charset="0"/>
-              </a:rPr>
-              <a:t>SHAP explanations highlight important features influencing results </a:t>
-            </a:r>
-          </a:p>
-        </p:txBody>
-      </p:sp>
-    </p:spTree>
-    <p:extLst>
-      <p:ext uri="{BB962C8B-B14F-4D97-AF65-F5344CB8AC3E}">
-        <p14:creationId xmlns:p14="http://schemas.microsoft.com/office/powerpoint/2010/main" val="2112456525"/>
-      </p:ext>
-    </p:extLst>
-  </p:cSld>
-  <p:clrMapOvr>
-    <a:masterClrMapping/>
-  </p:clrMapOvr>
-</p:sld>
-</file>
-
-<file path=ppt/slides/slide18.xml><?xml version="1.0" encoding="utf-8"?>
-<p:sld xmlns:a="http://schemas.openxmlformats.org/drawingml/2006/main" xmlns:r="http://schemas.openxmlformats.org/officeDocument/2006/relationships" xmlns:p="http://schemas.openxmlformats.org/presentationml/2006/main">
-  <p:cSld>
-    <p:spTree>
-      <p:nvGrpSpPr>
-        <p:cNvPr id="1" name=""/>
-        <p:cNvGrpSpPr/>
-        <p:nvPr/>
-      </p:nvGrpSpPr>
-      <p:grpSpPr>
-        <a:xfrm>
-          <a:off x="0" y="0"/>
-          <a:ext cx="0" cy="0"/>
-          <a:chOff x="0" y="0"/>
-          <a:chExt cx="0" cy="0"/>
-        </a:xfrm>
-      </p:grpSpPr>
-      <p:sp>
-        <p:nvSpPr>
-          <p:cNvPr id="2" name="Title 1"/>
-          <p:cNvSpPr>
-            <a:spLocks noGrp="1"/>
-          </p:cNvSpPr>
-          <p:nvPr>
-            <p:ph type="title"/>
-          </p:nvPr>
-        </p:nvSpPr>
-        <p:spPr/>
-        <p:txBody>
-          <a:bodyPr/>
-          <a:lstStyle/>
-          <a:p>
-            <a:r>
-              <a:t>Conclusion</a:t>
-            </a:r>
-          </a:p>
-        </p:txBody>
-      </p:sp>
-      <p:sp>
-        <p:nvSpPr>
-          <p:cNvPr id="3" name="Content Placeholder 2"/>
-          <p:cNvSpPr>
-            <a:spLocks noGrp="1"/>
-          </p:cNvSpPr>
-          <p:nvPr>
-            <p:ph idx="1"/>
-          </p:nvPr>
-        </p:nvSpPr>
-        <p:spPr>
-          <a:xfrm>
-            <a:off x="864382" y="2489200"/>
-            <a:ext cx="7780854" cy="3530600"/>
-          </a:xfrm>
-        </p:spPr>
-        <p:txBody>
-          <a:bodyPr>
-            <a:normAutofit/>
-          </a:bodyPr>
-          <a:lstStyle/>
-          <a:p>
-            <a:pPr marL="0" indent="0" algn="just">
-              <a:buNone/>
-            </a:pPr>
-            <a:r>
-              <a:rPr lang="en-US" dirty="0">
-                <a:latin typeface="Arial" panose="020B0604020202020204" pitchFamily="34" charset="0"/>
-                <a:cs typeface="Arial" panose="020B0604020202020204" pitchFamily="34" charset="0"/>
-              </a:rPr>
-              <a:t>The proposed Fake Review Detection System effectively identifies fake and genuine reviews using a combination of NLP, Machine Learning, Deep Learning, and Explainable AI. By integrating textual, sentiment, and behavioral features, the system improves accuracy and reliability. The use of SHAP enhances transparency by explaining model predictions. Overall, the system provides a robust and practical solution for detecting deceptive reviews in real-world applications.</a:t>
-            </a:r>
-            <a:endParaRPr dirty="0">
-              <a:latin typeface="Arial" panose="020B0604020202020204" pitchFamily="34" charset="0"/>
-              <a:cs typeface="Arial" panose="020B0604020202020204" pitchFamily="34" charset="0"/>
-            </a:endParaRPr>
-          </a:p>
-        </p:txBody>
-      </p:sp>
-    </p:spTree>
-  </p:cSld>
-  <p:clrMapOvr>
-    <a:masterClrMapping/>
-  </p:clrMapOvr>
-</p:sld>
-</file>
-
 <file path=ppt/slides/slide19.xml><?xml version="1.0" encoding="utf-8"?>
 <p:sld xmlns:a="http://schemas.openxmlformats.org/drawingml/2006/main" xmlns:r="http://schemas.openxmlformats.org/officeDocument/2006/relationships" xmlns:p="http://schemas.openxmlformats.org/presentationml/2006/main">
   <p:cSld>
@@ -15415,7 +15486,7 @@
           <a:p>
             <a:r>
               <a:rPr lang="en-US" dirty="0"/>
-              <a:t>Future Scope</a:t>
+              <a:t>Results &amp; Insights</a:t>
             </a:r>
           </a:p>
         </p:txBody>
@@ -15432,165 +15503,92 @@
         </p:nvSpPr>
         <p:spPr>
           <a:xfrm>
-            <a:off x="572655" y="2489200"/>
-            <a:ext cx="8100289" cy="3530600"/>
+            <a:off x="544945" y="2489200"/>
+            <a:ext cx="8118763" cy="3530600"/>
           </a:xfrm>
         </p:spPr>
         <p:txBody>
-          <a:bodyPr/>
+          <a:bodyPr>
+            <a:normAutofit/>
+          </a:bodyPr>
           <a:lstStyle/>
           <a:p>
-            <a:pPr algn="just"/>
             <a:r>
               <a:rPr lang="en-US" dirty="0">
                 <a:latin typeface="Arial" panose="020B0604020202020204" pitchFamily="34" charset="0"/>
                 <a:cs typeface="Arial" panose="020B0604020202020204" pitchFamily="34" charset="0"/>
               </a:rPr>
-              <a:t>Integration with real-time review </a:t>
-            </a:r>
-            <a:r>
-              <a:rPr lang="en-US" dirty="0" smtClean="0">
-                <a:latin typeface="Arial" panose="020B0604020202020204" pitchFamily="34" charset="0"/>
-                <a:cs typeface="Arial" panose="020B0604020202020204" pitchFamily="34" charset="0"/>
-              </a:rPr>
-              <a:t>systems</a:t>
-            </a:r>
-          </a:p>
-          <a:p>
-            <a:pPr algn="just"/>
-            <a:r>
-              <a:rPr lang="en-US" altLang="en-US" dirty="0">
-                <a:solidFill>
-                  <a:schemeClr val="tx1"/>
-                </a:solidFill>
-                <a:latin typeface="Arial" panose="020B0604020202020204" pitchFamily="34" charset="0"/>
-                <a:cs typeface="Arial" panose="020B0604020202020204" pitchFamily="34" charset="0"/>
-              </a:rPr>
-              <a:t>Use of advanced transformer models like BERT for better accuracy </a:t>
-            </a:r>
-          </a:p>
-          <a:p>
-            <a:pPr algn="just"/>
+              <a:t>Accurate classification of fake and genuine reviews </a:t>
+            </a:r>
+          </a:p>
+          <a:p>
             <a:r>
               <a:rPr lang="en-US" dirty="0">
                 <a:latin typeface="Arial" panose="020B0604020202020204" pitchFamily="34" charset="0"/>
                 <a:cs typeface="Arial" panose="020B0604020202020204" pitchFamily="34" charset="0"/>
               </a:rPr>
-              <a:t>Detection of multilingual fake </a:t>
-            </a:r>
-            <a:r>
-              <a:rPr lang="en-US" dirty="0" smtClean="0">
-                <a:latin typeface="Arial" panose="020B0604020202020204" pitchFamily="34" charset="0"/>
-                <a:cs typeface="Arial" panose="020B0604020202020204" pitchFamily="34" charset="0"/>
-              </a:rPr>
-              <a:t>reviews</a:t>
-            </a:r>
-          </a:p>
-          <a:p>
-            <a:pPr algn="just"/>
+              <a:t>Detection of patterns such as: </a:t>
+            </a:r>
+          </a:p>
+          <a:p>
+            <a:pPr lvl="1">
+              <a:buFont typeface="Wingdings" panose="05000000000000000000" pitchFamily="2" charset="2"/>
+              <a:buChar char="q"/>
+            </a:pPr>
             <a:r>
               <a:rPr lang="en-US" dirty="0">
                 <a:latin typeface="Arial" panose="020B0604020202020204" pitchFamily="34" charset="0"/>
                 <a:cs typeface="Arial" panose="020B0604020202020204" pitchFamily="34" charset="0"/>
               </a:rPr>
-              <a:t>Deployment as a web or mobile </a:t>
-            </a:r>
-            <a:r>
-              <a:rPr lang="en-US" dirty="0" smtClean="0">
-                <a:latin typeface="Arial" panose="020B0604020202020204" pitchFamily="34" charset="0"/>
-                <a:cs typeface="Arial" panose="020B0604020202020204" pitchFamily="34" charset="0"/>
-              </a:rPr>
-              <a:t>application</a:t>
-            </a:r>
-          </a:p>
-          <a:p>
-            <a:pPr algn="just"/>
+              <a:t>Repetitive and exaggerated language </a:t>
+            </a:r>
+          </a:p>
+          <a:p>
+            <a:pPr lvl="1">
+              <a:buFont typeface="Wingdings" panose="05000000000000000000" pitchFamily="2" charset="2"/>
+              <a:buChar char="q"/>
+            </a:pPr>
             <a:r>
               <a:rPr lang="en-US" dirty="0">
                 <a:latin typeface="Arial" panose="020B0604020202020204" pitchFamily="34" charset="0"/>
                 <a:cs typeface="Arial" panose="020B0604020202020204" pitchFamily="34" charset="0"/>
               </a:rPr>
-              <a:t>Continuous learning with live data</a:t>
-            </a:r>
-            <a:endParaRPr lang="en-US" dirty="0" smtClean="0">
-              <a:latin typeface="Arial" panose="020B0604020202020204" pitchFamily="34" charset="0"/>
-              <a:cs typeface="Arial" panose="020B0604020202020204" pitchFamily="34" charset="0"/>
-            </a:endParaRPr>
-          </a:p>
-          <a:p>
-            <a:pPr marL="0" lvl="0" indent="0" algn="just" defTabSz="914400" eaLnBrk="0" fontAlgn="base" hangingPunct="0">
-              <a:spcBef>
-                <a:spcPct val="0"/>
-              </a:spcBef>
-              <a:spcAft>
-                <a:spcPct val="0"/>
-              </a:spcAft>
-              <a:buClrTx/>
-              <a:buSzTx/>
-              <a:buNone/>
-            </a:pPr>
-            <a:endParaRPr lang="en-US" altLang="en-US" dirty="0">
-              <a:solidFill>
-                <a:schemeClr val="tx1"/>
-              </a:solidFill>
-              <a:latin typeface="Arial" panose="020B0604020202020204" pitchFamily="34" charset="0"/>
-              <a:cs typeface="Arial" panose="020B0604020202020204" pitchFamily="34" charset="0"/>
-            </a:endParaRPr>
-          </a:p>
-          <a:p>
-            <a:pPr marL="0" lvl="0" indent="0" algn="just" defTabSz="914400" eaLnBrk="0" fontAlgn="base" hangingPunct="0">
-              <a:spcBef>
-                <a:spcPct val="0"/>
-              </a:spcBef>
-              <a:spcAft>
-                <a:spcPct val="0"/>
-              </a:spcAft>
-              <a:buClrTx/>
-              <a:buSzTx/>
-              <a:buNone/>
-            </a:pPr>
-            <a:endParaRPr lang="en-US" altLang="en-US" dirty="0">
-              <a:solidFill>
-                <a:schemeClr val="tx1"/>
-              </a:solidFill>
-              <a:latin typeface="Arial" panose="020B0604020202020204" pitchFamily="34" charset="0"/>
-              <a:cs typeface="Arial" panose="020B0604020202020204" pitchFamily="34" charset="0"/>
-            </a:endParaRPr>
-          </a:p>
-          <a:p>
-            <a:pPr marL="0" lvl="0" indent="0" algn="just" defTabSz="914400" eaLnBrk="0" fontAlgn="base" hangingPunct="0">
-              <a:spcBef>
-                <a:spcPct val="0"/>
-              </a:spcBef>
-              <a:spcAft>
-                <a:spcPct val="0"/>
-              </a:spcAft>
-              <a:buClrTx/>
-              <a:buSzTx/>
-              <a:buFontTx/>
-              <a:buChar char="•"/>
-            </a:pPr>
-            <a:endParaRPr lang="en-US" altLang="en-US" dirty="0">
-              <a:solidFill>
-                <a:schemeClr val="tx1"/>
-              </a:solidFill>
-              <a:latin typeface="Arial" panose="020B0604020202020204" pitchFamily="34" charset="0"/>
-              <a:cs typeface="Arial" panose="020B0604020202020204" pitchFamily="34" charset="0"/>
-            </a:endParaRPr>
-          </a:p>
-          <a:p>
-            <a:pPr algn="just"/>
-            <a:endParaRPr lang="en-US" dirty="0">
-              <a:latin typeface="Arial" panose="020B0604020202020204" pitchFamily="34" charset="0"/>
-              <a:cs typeface="Arial" panose="020B0604020202020204" pitchFamily="34" charset="0"/>
-            </a:endParaRPr>
+              <a:t>Extreme sentiment behavior </a:t>
+            </a:r>
+          </a:p>
+          <a:p>
+            <a:r>
+              <a:rPr lang="en-US" dirty="0">
+                <a:latin typeface="Arial" panose="020B0604020202020204" pitchFamily="34" charset="0"/>
+                <a:cs typeface="Arial" panose="020B0604020202020204" pitchFamily="34" charset="0"/>
+              </a:rPr>
+              <a:t>Identification of suspicious users through behavioral analysis </a:t>
+            </a:r>
+          </a:p>
+          <a:p>
+            <a:r>
+              <a:rPr lang="en-US" dirty="0">
+                <a:latin typeface="Arial" panose="020B0604020202020204" pitchFamily="34" charset="0"/>
+                <a:cs typeface="Arial" panose="020B0604020202020204" pitchFamily="34" charset="0"/>
+              </a:rPr>
+              <a:t>Confidence score (Trust Gauge) based on model predictions </a:t>
+            </a:r>
+          </a:p>
+          <a:p>
+            <a:r>
+              <a:rPr lang="en-US" dirty="0">
+                <a:latin typeface="Arial" panose="020B0604020202020204" pitchFamily="34" charset="0"/>
+                <a:cs typeface="Arial" panose="020B0604020202020204" pitchFamily="34" charset="0"/>
+              </a:rPr>
+              <a:t>SHAP explanations highlight important features influencing results </a:t>
+            </a:r>
           </a:p>
         </p:txBody>
       </p:sp>
     </p:spTree>
     <p:extLst>
       <p:ext uri="{BB962C8B-B14F-4D97-AF65-F5344CB8AC3E}">
-        <p14:creationId xmlns:p14="http://schemas.microsoft.com/office/powerpoint/2010/main" val="3195704157"/>
+        <p14:creationId xmlns:p14="http://schemas.microsoft.com/office/powerpoint/2010/main" val="2112456525"/>
       </p:ext>
     </p:extLst>
   </p:cSld>
@@ -15706,7 +15704,7 @@
             </a:pPr>
             <a:r>
               <a:rPr lang="en-US" dirty="0">
-                <a:latin typeface="Century Gothic (Body)"/>
+                <a:latin typeface="Arial" panose="020B0604020202020204" pitchFamily="34" charset="0"/>
                 <a:cs typeface="Arial" panose="020B0604020202020204" pitchFamily="34" charset="0"/>
               </a:rPr>
               <a:t>Introduction </a:t>
@@ -15719,7 +15717,7 @@
             </a:pPr>
             <a:r>
               <a:rPr lang="en-US" dirty="0">
-                <a:latin typeface="Century Gothic (Body)"/>
+                <a:latin typeface="Arial" panose="020B0604020202020204" pitchFamily="34" charset="0"/>
                 <a:cs typeface="Arial" panose="020B0604020202020204" pitchFamily="34" charset="0"/>
               </a:rPr>
               <a:t>Problem Statement </a:t>
@@ -15732,7 +15730,7 @@
             </a:pPr>
             <a:r>
               <a:rPr lang="en-US" dirty="0">
-                <a:latin typeface="Century Gothic (Body)"/>
+                <a:latin typeface="Arial" panose="020B0604020202020204" pitchFamily="34" charset="0"/>
                 <a:cs typeface="Arial" panose="020B0604020202020204" pitchFamily="34" charset="0"/>
               </a:rPr>
               <a:t>Objectives </a:t>
@@ -15745,7 +15743,7 @@
             </a:pPr>
             <a:r>
               <a:rPr lang="en-US" dirty="0">
-                <a:latin typeface="Century Gothic (Body)"/>
+                <a:latin typeface="Arial" panose="020B0604020202020204" pitchFamily="34" charset="0"/>
                 <a:cs typeface="Arial" panose="020B0604020202020204" pitchFamily="34" charset="0"/>
               </a:rPr>
               <a:t>Dataset Description </a:t>
@@ -15758,7 +15756,7 @@
             </a:pPr>
             <a:r>
               <a:rPr lang="en-US" dirty="0">
-                <a:latin typeface="Century Gothic (Body)"/>
+                <a:latin typeface="Arial" panose="020B0604020202020204" pitchFamily="34" charset="0"/>
                 <a:cs typeface="Arial" panose="020B0604020202020204" pitchFamily="34" charset="0"/>
               </a:rPr>
               <a:t>Methodology </a:t>
@@ -15771,7 +15769,7 @@
             </a:pPr>
             <a:r>
               <a:rPr lang="en-US" dirty="0">
-                <a:latin typeface="Century Gothic (Body)"/>
+                <a:latin typeface="Arial" panose="020B0604020202020204" pitchFamily="34" charset="0"/>
                 <a:cs typeface="Arial" panose="020B0604020202020204" pitchFamily="34" charset="0"/>
               </a:rPr>
               <a:t>Feature Engineering </a:t>
@@ -15784,13 +15782,13 @@
             </a:pPr>
             <a:r>
               <a:rPr lang="en-US" dirty="0">
-                <a:latin typeface="Century Gothic (Body)"/>
+                <a:latin typeface="Arial" panose="020B0604020202020204" pitchFamily="34" charset="0"/>
                 <a:cs typeface="Arial" panose="020B0604020202020204" pitchFamily="34" charset="0"/>
               </a:rPr>
               <a:t>Model Development </a:t>
             </a:r>
             <a:endParaRPr lang="en-US" dirty="0" smtClean="0">
-              <a:latin typeface="Century Gothic (Body)"/>
+              <a:latin typeface="Arial" panose="020B0604020202020204" pitchFamily="34" charset="0"/>
               <a:cs typeface="Arial" panose="020B0604020202020204" pitchFamily="34" charset="0"/>
             </a:endParaRPr>
           </a:p>
@@ -15801,7 +15799,7 @@
             </a:pPr>
             <a:r>
               <a:rPr lang="en-US" dirty="0">
-                <a:latin typeface="Century Gothic (Body)"/>
+                <a:latin typeface="Arial" panose="020B0604020202020204" pitchFamily="34" charset="0"/>
                 <a:cs typeface="Arial" panose="020B0604020202020204" pitchFamily="34" charset="0"/>
               </a:rPr>
               <a:t>Evaluation </a:t>
@@ -15813,12 +15811,16 @@
               <a:buChar char="§"/>
             </a:pPr>
             <a:r>
-              <a:rPr lang="en-US" dirty="0">
-                <a:latin typeface="Century Gothic (Body)"/>
-                <a:cs typeface="Arial" panose="020B0604020202020204" pitchFamily="34" charset="0"/>
-              </a:rPr>
-              <a:t>Architecture </a:t>
-            </a:r>
+              <a:rPr lang="en-US" dirty="0" smtClean="0">
+                <a:latin typeface="Arial" panose="020B0604020202020204" pitchFamily="34" charset="0"/>
+                <a:cs typeface="Arial" panose="020B0604020202020204" pitchFamily="34" charset="0"/>
+              </a:rPr>
+              <a:t>System Architecture </a:t>
+            </a:r>
+            <a:endParaRPr lang="en-US" dirty="0">
+              <a:latin typeface="Arial" panose="020B0604020202020204" pitchFamily="34" charset="0"/>
+              <a:cs typeface="Arial" panose="020B0604020202020204" pitchFamily="34" charset="0"/>
+            </a:endParaRPr>
           </a:p>
           <a:p>
             <a:pPr>
@@ -15827,7 +15829,7 @@
             </a:pPr>
             <a:r>
               <a:rPr lang="en-US" dirty="0">
-                <a:latin typeface="Century Gothic (Body)"/>
+                <a:latin typeface="Arial" panose="020B0604020202020204" pitchFamily="34" charset="0"/>
                 <a:cs typeface="Arial" panose="020B0604020202020204" pitchFamily="34" charset="0"/>
               </a:rPr>
               <a:t>Results &amp; Insights </a:t>
@@ -15840,7 +15842,7 @@
             </a:pPr>
             <a:r>
               <a:rPr lang="en-US" dirty="0">
-                <a:latin typeface="Century Gothic (Body)"/>
+                <a:latin typeface="Arial" panose="020B0604020202020204" pitchFamily="34" charset="0"/>
                 <a:cs typeface="Arial" panose="020B0604020202020204" pitchFamily="34" charset="0"/>
               </a:rPr>
               <a:t>Conclusion </a:t>
@@ -15853,7 +15855,7 @@
             </a:pPr>
             <a:r>
               <a:rPr lang="en-US" dirty="0">
-                <a:latin typeface="Century Gothic (Body)"/>
+                <a:latin typeface="Arial" panose="020B0604020202020204" pitchFamily="34" charset="0"/>
                 <a:cs typeface="Arial" panose="020B0604020202020204" pitchFamily="34" charset="0"/>
               </a:rPr>
               <a:t>References </a:t>
@@ -15865,7 +15867,7 @@
               <a:buChar char="§"/>
             </a:pPr>
             <a:endParaRPr lang="en-US" dirty="0">
-              <a:latin typeface="Century Gothic (Body)"/>
+              <a:latin typeface="Arial" panose="020B0604020202020204" pitchFamily="34" charset="0"/>
               <a:cs typeface="Arial" panose="020B0604020202020204" pitchFamily="34" charset="0"/>
             </a:endParaRPr>
           </a:p>
@@ -15917,6 +15919,310 @@
           <a:lstStyle/>
           <a:p>
             <a:r>
+              <a:t>Conclusion</a:t>
+            </a:r>
+          </a:p>
+        </p:txBody>
+      </p:sp>
+      <p:sp>
+        <p:nvSpPr>
+          <p:cNvPr id="3" name="Content Placeholder 2"/>
+          <p:cNvSpPr>
+            <a:spLocks noGrp="1"/>
+          </p:cNvSpPr>
+          <p:nvPr>
+            <p:ph idx="1"/>
+          </p:nvPr>
+        </p:nvSpPr>
+        <p:spPr>
+          <a:xfrm>
+            <a:off x="864382" y="2489200"/>
+            <a:ext cx="7780854" cy="3530600"/>
+          </a:xfrm>
+        </p:spPr>
+        <p:txBody>
+          <a:bodyPr>
+            <a:normAutofit/>
+          </a:bodyPr>
+          <a:lstStyle/>
+          <a:p>
+            <a:pPr marL="0" indent="0" algn="just">
+              <a:buNone/>
+            </a:pPr>
+            <a:r>
+              <a:rPr lang="en-US" dirty="0">
+                <a:latin typeface="Arial" panose="020B0604020202020204" pitchFamily="34" charset="0"/>
+                <a:cs typeface="Arial" panose="020B0604020202020204" pitchFamily="34" charset="0"/>
+              </a:rPr>
+              <a:t>The proposed Fake Review Detection System effectively identifies fake and genuine reviews using a combination of NLP, Machine Learning, Deep Learning, and Explainable AI. By integrating textual, sentiment, and behavioral features, the system improves accuracy and reliability. The use of SHAP enhances transparency by explaining model predictions. Overall, the system provides a robust and practical solution for detecting deceptive reviews in real-world applications.</a:t>
+            </a:r>
+            <a:endParaRPr dirty="0">
+              <a:latin typeface="Arial" panose="020B0604020202020204" pitchFamily="34" charset="0"/>
+              <a:cs typeface="Arial" panose="020B0604020202020204" pitchFamily="34" charset="0"/>
+            </a:endParaRPr>
+          </a:p>
+        </p:txBody>
+      </p:sp>
+    </p:spTree>
+  </p:cSld>
+  <p:clrMapOvr>
+    <a:masterClrMapping/>
+  </p:clrMapOvr>
+</p:sld>
+</file>
+
+<file path=ppt/slides/slide21.xml><?xml version="1.0" encoding="utf-8"?>
+<p:sld xmlns:a="http://schemas.openxmlformats.org/drawingml/2006/main" xmlns:r="http://schemas.openxmlformats.org/officeDocument/2006/relationships" xmlns:p="http://schemas.openxmlformats.org/presentationml/2006/main">
+  <p:cSld>
+    <p:spTree>
+      <p:nvGrpSpPr>
+        <p:cNvPr id="1" name=""/>
+        <p:cNvGrpSpPr/>
+        <p:nvPr/>
+      </p:nvGrpSpPr>
+      <p:grpSpPr>
+        <a:xfrm>
+          <a:off x="0" y="0"/>
+          <a:ext cx="0" cy="0"/>
+          <a:chOff x="0" y="0"/>
+          <a:chExt cx="0" cy="0"/>
+        </a:xfrm>
+      </p:grpSpPr>
+      <p:sp>
+        <p:nvSpPr>
+          <p:cNvPr id="2" name="Title 1"/>
+          <p:cNvSpPr>
+            <a:spLocks noGrp="1"/>
+          </p:cNvSpPr>
+          <p:nvPr>
+            <p:ph type="title"/>
+          </p:nvPr>
+        </p:nvSpPr>
+        <p:spPr/>
+        <p:txBody>
+          <a:bodyPr/>
+          <a:lstStyle/>
+          <a:p>
+            <a:r>
+              <a:rPr lang="en-US" dirty="0"/>
+              <a:t>Future Scope</a:t>
+            </a:r>
+          </a:p>
+        </p:txBody>
+      </p:sp>
+      <p:sp>
+        <p:nvSpPr>
+          <p:cNvPr id="3" name="Content Placeholder 2"/>
+          <p:cNvSpPr>
+            <a:spLocks noGrp="1"/>
+          </p:cNvSpPr>
+          <p:nvPr>
+            <p:ph idx="1"/>
+          </p:nvPr>
+        </p:nvSpPr>
+        <p:spPr>
+          <a:xfrm>
+            <a:off x="572655" y="2489200"/>
+            <a:ext cx="8100289" cy="3530600"/>
+          </a:xfrm>
+        </p:spPr>
+        <p:txBody>
+          <a:bodyPr/>
+          <a:lstStyle/>
+          <a:p>
+            <a:pPr algn="just"/>
+            <a:r>
+              <a:rPr lang="en-US" dirty="0">
+                <a:latin typeface="Arial" panose="020B0604020202020204" pitchFamily="34" charset="0"/>
+                <a:cs typeface="Arial" panose="020B0604020202020204" pitchFamily="34" charset="0"/>
+              </a:rPr>
+              <a:t>Integration with real-time review </a:t>
+            </a:r>
+            <a:r>
+              <a:rPr lang="en-US" dirty="0" smtClean="0">
+                <a:latin typeface="Arial" panose="020B0604020202020204" pitchFamily="34" charset="0"/>
+                <a:cs typeface="Arial" panose="020B0604020202020204" pitchFamily="34" charset="0"/>
+              </a:rPr>
+              <a:t>systems</a:t>
+            </a:r>
+          </a:p>
+          <a:p>
+            <a:pPr algn="just"/>
+            <a:r>
+              <a:rPr lang="en-US" altLang="en-US" dirty="0">
+                <a:solidFill>
+                  <a:schemeClr val="tx1"/>
+                </a:solidFill>
+                <a:latin typeface="Arial" panose="020B0604020202020204" pitchFamily="34" charset="0"/>
+                <a:cs typeface="Arial" panose="020B0604020202020204" pitchFamily="34" charset="0"/>
+              </a:rPr>
+              <a:t>Use of advanced transformer models like BERT for better accuracy </a:t>
+            </a:r>
+          </a:p>
+          <a:p>
+            <a:pPr algn="just"/>
+            <a:r>
+              <a:rPr lang="en-US" dirty="0">
+                <a:latin typeface="Arial" panose="020B0604020202020204" pitchFamily="34" charset="0"/>
+                <a:cs typeface="Arial" panose="020B0604020202020204" pitchFamily="34" charset="0"/>
+              </a:rPr>
+              <a:t>Detection of multilingual fake </a:t>
+            </a:r>
+            <a:r>
+              <a:rPr lang="en-US" dirty="0" smtClean="0">
+                <a:latin typeface="Arial" panose="020B0604020202020204" pitchFamily="34" charset="0"/>
+                <a:cs typeface="Arial" panose="020B0604020202020204" pitchFamily="34" charset="0"/>
+              </a:rPr>
+              <a:t>reviews</a:t>
+            </a:r>
+          </a:p>
+          <a:p>
+            <a:pPr algn="just"/>
+            <a:r>
+              <a:rPr lang="en-US" dirty="0">
+                <a:latin typeface="Arial" panose="020B0604020202020204" pitchFamily="34" charset="0"/>
+                <a:cs typeface="Arial" panose="020B0604020202020204" pitchFamily="34" charset="0"/>
+              </a:rPr>
+              <a:t>Deployment as a web or mobile </a:t>
+            </a:r>
+            <a:r>
+              <a:rPr lang="en-US" dirty="0" smtClean="0">
+                <a:latin typeface="Arial" panose="020B0604020202020204" pitchFamily="34" charset="0"/>
+                <a:cs typeface="Arial" panose="020B0604020202020204" pitchFamily="34" charset="0"/>
+              </a:rPr>
+              <a:t>application</a:t>
+            </a:r>
+          </a:p>
+          <a:p>
+            <a:pPr algn="just"/>
+            <a:r>
+              <a:rPr lang="en-US" dirty="0">
+                <a:latin typeface="Arial" panose="020B0604020202020204" pitchFamily="34" charset="0"/>
+                <a:cs typeface="Arial" panose="020B0604020202020204" pitchFamily="34" charset="0"/>
+              </a:rPr>
+              <a:t>Continuous learning with live data</a:t>
+            </a:r>
+            <a:endParaRPr lang="en-US" dirty="0" smtClean="0">
+              <a:latin typeface="Arial" panose="020B0604020202020204" pitchFamily="34" charset="0"/>
+              <a:cs typeface="Arial" panose="020B0604020202020204" pitchFamily="34" charset="0"/>
+            </a:endParaRPr>
+          </a:p>
+          <a:p>
+            <a:pPr marL="0" lvl="0" indent="0" algn="just" defTabSz="914400" eaLnBrk="0" fontAlgn="base" hangingPunct="0">
+              <a:spcBef>
+                <a:spcPct val="0"/>
+              </a:spcBef>
+              <a:spcAft>
+                <a:spcPct val="0"/>
+              </a:spcAft>
+              <a:buClrTx/>
+              <a:buSzTx/>
+              <a:buNone/>
+            </a:pPr>
+            <a:endParaRPr lang="en-US" altLang="en-US" dirty="0">
+              <a:solidFill>
+                <a:schemeClr val="tx1"/>
+              </a:solidFill>
+              <a:latin typeface="Arial" panose="020B0604020202020204" pitchFamily="34" charset="0"/>
+              <a:cs typeface="Arial" panose="020B0604020202020204" pitchFamily="34" charset="0"/>
+            </a:endParaRPr>
+          </a:p>
+          <a:p>
+            <a:pPr marL="0" lvl="0" indent="0" algn="just" defTabSz="914400" eaLnBrk="0" fontAlgn="base" hangingPunct="0">
+              <a:spcBef>
+                <a:spcPct val="0"/>
+              </a:spcBef>
+              <a:spcAft>
+                <a:spcPct val="0"/>
+              </a:spcAft>
+              <a:buClrTx/>
+              <a:buSzTx/>
+              <a:buNone/>
+            </a:pPr>
+            <a:endParaRPr lang="en-US" altLang="en-US" dirty="0">
+              <a:solidFill>
+                <a:schemeClr val="tx1"/>
+              </a:solidFill>
+              <a:latin typeface="Arial" panose="020B0604020202020204" pitchFamily="34" charset="0"/>
+              <a:cs typeface="Arial" panose="020B0604020202020204" pitchFamily="34" charset="0"/>
+            </a:endParaRPr>
+          </a:p>
+          <a:p>
+            <a:pPr marL="0" lvl="0" indent="0" algn="just" defTabSz="914400" eaLnBrk="0" fontAlgn="base" hangingPunct="0">
+              <a:spcBef>
+                <a:spcPct val="0"/>
+              </a:spcBef>
+              <a:spcAft>
+                <a:spcPct val="0"/>
+              </a:spcAft>
+              <a:buClrTx/>
+              <a:buSzTx/>
+              <a:buFontTx/>
+              <a:buChar char="•"/>
+            </a:pPr>
+            <a:endParaRPr lang="en-US" altLang="en-US" dirty="0">
+              <a:solidFill>
+                <a:schemeClr val="tx1"/>
+              </a:solidFill>
+              <a:latin typeface="Arial" panose="020B0604020202020204" pitchFamily="34" charset="0"/>
+              <a:cs typeface="Arial" panose="020B0604020202020204" pitchFamily="34" charset="0"/>
+            </a:endParaRPr>
+          </a:p>
+          <a:p>
+            <a:pPr algn="just"/>
+            <a:endParaRPr lang="en-US" dirty="0">
+              <a:latin typeface="Arial" panose="020B0604020202020204" pitchFamily="34" charset="0"/>
+              <a:cs typeface="Arial" panose="020B0604020202020204" pitchFamily="34" charset="0"/>
+            </a:endParaRPr>
+          </a:p>
+        </p:txBody>
+      </p:sp>
+    </p:spTree>
+    <p:extLst>
+      <p:ext uri="{BB962C8B-B14F-4D97-AF65-F5344CB8AC3E}">
+        <p14:creationId xmlns:p14="http://schemas.microsoft.com/office/powerpoint/2010/main" val="3195704157"/>
+      </p:ext>
+    </p:extLst>
+  </p:cSld>
+  <p:clrMapOvr>
+    <a:masterClrMapping/>
+  </p:clrMapOvr>
+</p:sld>
+</file>
+
+<file path=ppt/slides/slide22.xml><?xml version="1.0" encoding="utf-8"?>
+<p:sld xmlns:a="http://schemas.openxmlformats.org/drawingml/2006/main" xmlns:r="http://schemas.openxmlformats.org/officeDocument/2006/relationships" xmlns:p="http://schemas.openxmlformats.org/presentationml/2006/main">
+  <p:cSld>
+    <p:spTree>
+      <p:nvGrpSpPr>
+        <p:cNvPr id="1" name=""/>
+        <p:cNvGrpSpPr/>
+        <p:nvPr/>
+      </p:nvGrpSpPr>
+      <p:grpSpPr>
+        <a:xfrm>
+          <a:off x="0" y="0"/>
+          <a:ext cx="0" cy="0"/>
+          <a:chOff x="0" y="0"/>
+          <a:chExt cx="0" cy="0"/>
+        </a:xfrm>
+      </p:grpSpPr>
+      <p:sp>
+        <p:nvSpPr>
+          <p:cNvPr id="2" name="Title 1"/>
+          <p:cNvSpPr>
+            <a:spLocks noGrp="1"/>
+          </p:cNvSpPr>
+          <p:nvPr>
+            <p:ph type="title"/>
+          </p:nvPr>
+        </p:nvSpPr>
+        <p:spPr/>
+        <p:txBody>
+          <a:bodyPr/>
+          <a:lstStyle/>
+          <a:p>
+            <a:r>
               <a:rPr lang="en-US" dirty="0" smtClean="0"/>
               <a:t>References</a:t>
             </a:r>
@@ -16288,69 +16594,44 @@
         </p:nvSpPr>
         <p:spPr>
           <a:xfrm>
-            <a:off x="543027" y="2673927"/>
+            <a:off x="543027" y="2489200"/>
             <a:ext cx="8057945" cy="3530600"/>
           </a:xfrm>
         </p:spPr>
         <p:txBody>
           <a:bodyPr>
-            <a:normAutofit/>
+            <a:normAutofit lnSpcReduction="10000"/>
           </a:bodyPr>
           <a:lstStyle/>
           <a:p>
             <a:pPr algn="just"/>
             <a:r>
-              <a:rPr lang="en-US" dirty="0"/>
-              <a:t>Online platforms depend on user </a:t>
-            </a:r>
-            <a:r>
-              <a:rPr lang="en-US" dirty="0" smtClean="0"/>
-              <a:t>reviews</a:t>
+              <a:rPr lang="en-US" dirty="0">
+                <a:latin typeface="Arial" panose="020B0604020202020204" pitchFamily="34" charset="0"/>
+                <a:cs typeface="Arial" panose="020B0604020202020204" pitchFamily="34" charset="0"/>
+              </a:rPr>
+              <a:t>Online platforms rely heavily on user reviews to influence customer decisions. However, the increasing presence of fake reviews has created serious challenges in maintaining trust and credibility. These deceptive reviews are often generated to manipulate product ratings and mislead users.</a:t>
             </a:r>
           </a:p>
           <a:p>
             <a:pPr algn="just"/>
             <a:r>
-              <a:rPr lang="en-US" dirty="0"/>
-              <a:t>Fake reviews reduce trust and </a:t>
-            </a:r>
-            <a:r>
-              <a:rPr lang="en-US" dirty="0" smtClean="0"/>
-              <a:t>credibility</a:t>
+              <a:rPr lang="en-US" dirty="0">
+                <a:latin typeface="Arial" panose="020B0604020202020204" pitchFamily="34" charset="0"/>
+                <a:cs typeface="Arial" panose="020B0604020202020204" pitchFamily="34" charset="0"/>
+              </a:rPr>
+              <a:t>This project focuses on developing an intelligent system to detect fake reviews using a combination of Natural Language Processing (NLP), Machine Learning, and Deep Learning techniques. The system analyzes both the textual content and behavioral patterns of reviewers to identify suspicious activities.</a:t>
             </a:r>
           </a:p>
           <a:p>
             <a:pPr algn="just"/>
             <a:r>
-              <a:rPr lang="en-US" dirty="0"/>
-              <a:t>Difficult to distinguish fake vs genuine </a:t>
-            </a:r>
-            <a:r>
-              <a:rPr lang="en-US" dirty="0" smtClean="0"/>
-              <a:t>reviews</a:t>
-            </a:r>
-          </a:p>
-          <a:p>
-            <a:pPr algn="just"/>
-            <a:r>
-              <a:rPr lang="en-US" dirty="0"/>
-              <a:t>Need for intelligent detection </a:t>
-            </a:r>
-            <a:r>
-              <a:rPr lang="en-US" dirty="0" smtClean="0"/>
-              <a:t>system</a:t>
-            </a:r>
-          </a:p>
-          <a:p>
-            <a:pPr algn="just"/>
-            <a:r>
-              <a:rPr lang="en-US" dirty="0"/>
-              <a:t>Uses NLP, ML, DL, and Explainable AI</a:t>
-            </a:r>
-            <a:endParaRPr lang="en-US" dirty="0">
-              <a:latin typeface="Arial" panose="020B0604020202020204" pitchFamily="34" charset="0"/>
-              <a:cs typeface="Arial" panose="020B0604020202020204" pitchFamily="34" charset="0"/>
-            </a:endParaRPr>
+              <a:rPr lang="en-US" dirty="0">
+                <a:latin typeface="Arial" panose="020B0604020202020204" pitchFamily="34" charset="0"/>
+                <a:cs typeface="Arial" panose="020B0604020202020204" pitchFamily="34" charset="0"/>
+              </a:rPr>
+              <a:t>By integrating multiple approaches, the proposed system aims to provide accurate, reliable, and explainable predictions for review authenticity.</a:t>
+            </a:r>
           </a:p>
         </p:txBody>
       </p:sp>
@@ -16427,27 +16708,33 @@
           </a:bodyPr>
           <a:lstStyle/>
           <a:p>
-            <a:r>
-              <a:rPr lang="en-US" dirty="0"/>
-              <a:t>Fake reviews manipulate product ratings </a:t>
-            </a:r>
-          </a:p>
-          <a:p>
-            <a:r>
-              <a:rPr lang="en-US" dirty="0"/>
-              <a:t>Mislead users and affect decisions </a:t>
-            </a:r>
-          </a:p>
-          <a:p>
-            <a:r>
-              <a:rPr lang="en-US" dirty="0"/>
-              <a:t>Hard to detect using simple methods </a:t>
-            </a:r>
-          </a:p>
-          <a:p>
-            <a:r>
-              <a:rPr lang="en-US" dirty="0"/>
-              <a:t>Requires automated and intelligent system </a:t>
+            <a:pPr algn="just"/>
+            <a:r>
+              <a:rPr lang="en-US" dirty="0">
+                <a:latin typeface="Arial" panose="020B0604020202020204" pitchFamily="34" charset="0"/>
+                <a:cs typeface="Arial" panose="020B0604020202020204" pitchFamily="34" charset="0"/>
+              </a:rPr>
+              <a:t>Online platforms such as e-commerce websites and review portals rely heavily on user-generated reviews to guide customer decisions. However, the presence of fake or deceptive reviews has become a major issue, leading to misleading information and reduced user trust.</a:t>
+            </a:r>
+          </a:p>
+          <a:p>
+            <a:pPr algn="just"/>
+            <a:r>
+              <a:rPr lang="en-US" dirty="0">
+                <a:latin typeface="Arial" panose="020B0604020202020204" pitchFamily="34" charset="0"/>
+                <a:cs typeface="Arial" panose="020B0604020202020204" pitchFamily="34" charset="0"/>
+              </a:rPr>
+              <a:t>Fake reviews are often generated to artificially boost or harm product ratings. These reviews may appear genuine, making them difficult to detect using simple techniques.</a:t>
+            </a:r>
+          </a:p>
+          <a:p>
+            <a:pPr algn="just"/>
+            <a:r>
+              <a:rPr lang="en-US" dirty="0">
+                <a:latin typeface="Arial" panose="020B0604020202020204" pitchFamily="34" charset="0"/>
+                <a:cs typeface="Arial" panose="020B0604020202020204" pitchFamily="34" charset="0"/>
+              </a:rPr>
+              <a:t>Therefore, there is a need for an intelligent and automated system that can accurately identify fake reviews by analyzing both textual content and user behavior.</a:t>
             </a:r>
           </a:p>
         </p:txBody>
@@ -16516,79 +16803,119 @@
         </p:spPr>
         <p:txBody>
           <a:bodyPr>
-            <a:normAutofit/>
+            <a:normAutofit fontScale="92500"/>
           </a:bodyPr>
           <a:lstStyle/>
           <a:p>
-            <a:r>
-              <a:rPr lang="en-US" dirty="0"/>
-              <a:t>Detect fake and genuine </a:t>
-            </a:r>
-            <a:r>
-              <a:rPr lang="en-US" dirty="0" smtClean="0"/>
+            <a:pPr algn="just"/>
+            <a:r>
+              <a:rPr lang="en-US" dirty="0">
+                <a:latin typeface="Arial" panose="020B0604020202020204" pitchFamily="34" charset="0"/>
+                <a:cs typeface="Arial" panose="020B0604020202020204" pitchFamily="34" charset="0"/>
+              </a:rPr>
+              <a:t>To develop a system for detecting fake and genuine </a:t>
+            </a:r>
+            <a:r>
+              <a:rPr lang="en-US" dirty="0" smtClean="0">
+                <a:latin typeface="Arial" panose="020B0604020202020204" pitchFamily="34" charset="0"/>
+                <a:cs typeface="Arial" panose="020B0604020202020204" pitchFamily="34" charset="0"/>
+              </a:rPr>
               <a:t>reviews</a:t>
             </a:r>
           </a:p>
           <a:p>
-            <a:r>
-              <a:rPr lang="en-US" dirty="0"/>
-              <a:t>Apply NLP techniques for text </a:t>
-            </a:r>
-            <a:r>
-              <a:rPr lang="en-US" dirty="0" smtClean="0"/>
+            <a:pPr algn="just"/>
+            <a:r>
+              <a:rPr lang="en-US" dirty="0">
+                <a:latin typeface="Arial" panose="020B0604020202020204" pitchFamily="34" charset="0"/>
+                <a:cs typeface="Arial" panose="020B0604020202020204" pitchFamily="34" charset="0"/>
+              </a:rPr>
+              <a:t>To apply Natural Language Processing (NLP) techniques for text </a:t>
+            </a:r>
+            <a:r>
+              <a:rPr lang="en-US" dirty="0" smtClean="0">
+                <a:latin typeface="Arial" panose="020B0604020202020204" pitchFamily="34" charset="0"/>
+                <a:cs typeface="Arial" panose="020B0604020202020204" pitchFamily="34" charset="0"/>
+              </a:rPr>
               <a:t>analysis</a:t>
             </a:r>
           </a:p>
           <a:p>
-            <a:r>
-              <a:rPr lang="en-US" dirty="0"/>
-              <a:t>Extract textual, sentiment, behavioral </a:t>
-            </a:r>
-            <a:r>
-              <a:rPr lang="en-US" dirty="0" smtClean="0"/>
-              <a:t>features</a:t>
-            </a:r>
-          </a:p>
-          <a:p>
-            <a:r>
-              <a:rPr lang="fr-FR" dirty="0" err="1"/>
-              <a:t>Implement</a:t>
-            </a:r>
-            <a:r>
-              <a:rPr lang="fr-FR" dirty="0"/>
-              <a:t> ML </a:t>
-            </a:r>
-            <a:r>
-              <a:rPr lang="fr-FR" dirty="0" err="1"/>
-              <a:t>models</a:t>
-            </a:r>
-            <a:r>
-              <a:rPr lang="fr-FR" dirty="0"/>
-              <a:t> (LR, SVM, RF</a:t>
-            </a:r>
-            <a:r>
-              <a:rPr lang="fr-FR" dirty="0" smtClean="0"/>
-              <a:t>)</a:t>
-            </a:r>
-          </a:p>
-          <a:p>
-            <a:r>
-              <a:rPr lang="en-US" dirty="0"/>
-              <a:t>Use LSTM for contextual </a:t>
-            </a:r>
-            <a:r>
-              <a:rPr lang="en-US" dirty="0" smtClean="0"/>
-              <a:t>understanding</a:t>
-            </a:r>
-          </a:p>
-          <a:p>
-            <a:r>
-              <a:rPr lang="en-US" dirty="0"/>
-              <a:t>Apply SHAP for </a:t>
-            </a:r>
-            <a:r>
-              <a:rPr lang="en-US" dirty="0" err="1"/>
-              <a:t>explainability</a:t>
+            <a:pPr algn="just"/>
+            <a:r>
+              <a:rPr lang="en-US" dirty="0">
+                <a:latin typeface="Arial" panose="020B0604020202020204" pitchFamily="34" charset="0"/>
+                <a:cs typeface="Arial" panose="020B0604020202020204" pitchFamily="34" charset="0"/>
+              </a:rPr>
+              <a:t>To extract meaningful features such as TF-IDF, sentiment, and behavioral </a:t>
+            </a:r>
+            <a:r>
+              <a:rPr lang="en-US" dirty="0" smtClean="0">
+                <a:latin typeface="Arial" panose="020B0604020202020204" pitchFamily="34" charset="0"/>
+                <a:cs typeface="Arial" panose="020B0604020202020204" pitchFamily="34" charset="0"/>
+              </a:rPr>
+              <a:t>patterns</a:t>
+            </a:r>
+          </a:p>
+          <a:p>
+            <a:pPr algn="just"/>
+            <a:r>
+              <a:rPr lang="en-US" dirty="0">
+                <a:latin typeface="Arial" panose="020B0604020202020204" pitchFamily="34" charset="0"/>
+                <a:cs typeface="Arial" panose="020B0604020202020204" pitchFamily="34" charset="0"/>
+              </a:rPr>
+              <a:t>To implement Machine Learning models like Logistic Regression, SVM, and Random </a:t>
+            </a:r>
+            <a:r>
+              <a:rPr lang="en-US" dirty="0" smtClean="0">
+                <a:latin typeface="Arial" panose="020B0604020202020204" pitchFamily="34" charset="0"/>
+                <a:cs typeface="Arial" panose="020B0604020202020204" pitchFamily="34" charset="0"/>
+              </a:rPr>
+              <a:t>Forest</a:t>
+            </a:r>
+          </a:p>
+          <a:p>
+            <a:pPr algn="just"/>
+            <a:r>
+              <a:rPr lang="en-US" dirty="0">
+                <a:latin typeface="Arial" panose="020B0604020202020204" pitchFamily="34" charset="0"/>
+                <a:cs typeface="Arial" panose="020B0604020202020204" pitchFamily="34" charset="0"/>
+              </a:rPr>
+              <a:t>To use Deep Learning (LSTM) for capturing contextual information in </a:t>
+            </a:r>
+            <a:r>
+              <a:rPr lang="en-US" dirty="0" smtClean="0">
+                <a:latin typeface="Arial" panose="020B0604020202020204" pitchFamily="34" charset="0"/>
+                <a:cs typeface="Arial" panose="020B0604020202020204" pitchFamily="34" charset="0"/>
+              </a:rPr>
+              <a:t>text</a:t>
+            </a:r>
+          </a:p>
+          <a:p>
+            <a:pPr algn="just"/>
+            <a:r>
+              <a:rPr lang="en-US" dirty="0">
+                <a:latin typeface="Arial" panose="020B0604020202020204" pitchFamily="34" charset="0"/>
+                <a:cs typeface="Arial" panose="020B0604020202020204" pitchFamily="34" charset="0"/>
+              </a:rPr>
+              <a:t>To integrate Explainable AI (SHAP) for interpreting model </a:t>
+            </a:r>
+            <a:r>
+              <a:rPr lang="en-US" dirty="0" smtClean="0">
+                <a:latin typeface="Arial" panose="020B0604020202020204" pitchFamily="34" charset="0"/>
+                <a:cs typeface="Arial" panose="020B0604020202020204" pitchFamily="34" charset="0"/>
+              </a:rPr>
+              <a:t>predictions</a:t>
+            </a:r>
+          </a:p>
+          <a:p>
+            <a:pPr algn="just"/>
+            <a:r>
+              <a:rPr lang="en-US" dirty="0">
+                <a:latin typeface="Arial" panose="020B0604020202020204" pitchFamily="34" charset="0"/>
+                <a:cs typeface="Arial" panose="020B0604020202020204" pitchFamily="34" charset="0"/>
+              </a:rPr>
+              <a:t>To evaluate model performance using standard metrics such as accuracy, precision, recall, and F1-score</a:t>
             </a:r>
             <a:endParaRPr lang="en-US" dirty="0">
               <a:latin typeface="Arial" panose="020B0604020202020204" pitchFamily="34" charset="0"/>
@@ -16743,7 +17070,7 @@
         </p:nvSpPr>
         <p:spPr>
           <a:xfrm>
-            <a:off x="578053" y="2662382"/>
+            <a:off x="578053" y="2468418"/>
             <a:ext cx="8057947" cy="3530600"/>
           </a:xfrm>
         </p:spPr>
@@ -16755,41 +17082,73 @@
           <a:p>
             <a:pPr algn="just"/>
             <a:r>
-              <a:rPr lang="en-US" dirty="0"/>
-              <a:t>Synthetic dataset simulating real-world </a:t>
-            </a:r>
-            <a:r>
-              <a:rPr lang="en-US" dirty="0" smtClean="0"/>
-              <a:t>reviews</a:t>
+              <a:rPr lang="en-US" dirty="0" smtClean="0">
+                <a:latin typeface="Arial" panose="020B0604020202020204" pitchFamily="34" charset="0"/>
+                <a:cs typeface="Arial" panose="020B0604020202020204" pitchFamily="34" charset="0"/>
+              </a:rPr>
+              <a:t>The dataset used in this project is a </a:t>
+            </a:r>
+            <a:r>
+              <a:rPr lang="en-US" b="1" dirty="0" smtClean="0">
+                <a:latin typeface="Arial" panose="020B0604020202020204" pitchFamily="34" charset="0"/>
+                <a:cs typeface="Arial" panose="020B0604020202020204" pitchFamily="34" charset="0"/>
+              </a:rPr>
+              <a:t>synthetic yet realistic collection of online reviews</a:t>
+            </a:r>
+            <a:r>
+              <a:rPr lang="en-US" dirty="0" smtClean="0">
+                <a:latin typeface="Arial" panose="020B0604020202020204" pitchFamily="34" charset="0"/>
+                <a:cs typeface="Arial" panose="020B0604020202020204" pitchFamily="34" charset="0"/>
+              </a:rPr>
+              <a:t> designed specifically for fake review detection. It contains both genuine and fake reviews along with relevant metadata such as ratings, reviewer information, and timestamps.</a:t>
             </a:r>
           </a:p>
           <a:p>
             <a:pPr algn="just"/>
             <a:r>
-              <a:rPr lang="en-US" dirty="0"/>
-              <a:t>Contains both fake and genuine </a:t>
-            </a:r>
-            <a:r>
-              <a:rPr lang="en-US" dirty="0" smtClean="0"/>
-              <a:t>reviews</a:t>
+              <a:rPr lang="en-US" dirty="0" smtClean="0">
+                <a:latin typeface="Arial" panose="020B0604020202020204" pitchFamily="34" charset="0"/>
+                <a:cs typeface="Arial" panose="020B0604020202020204" pitchFamily="34" charset="0"/>
+              </a:rPr>
+              <a:t>The dataset includes both </a:t>
+            </a:r>
+            <a:r>
+              <a:rPr lang="en-US" b="1" dirty="0" smtClean="0">
+                <a:latin typeface="Arial" panose="020B0604020202020204" pitchFamily="34" charset="0"/>
+                <a:cs typeface="Arial" panose="020B0604020202020204" pitchFamily="34" charset="0"/>
+              </a:rPr>
+              <a:t>structured data</a:t>
+            </a:r>
+            <a:r>
+              <a:rPr lang="en-US" dirty="0" smtClean="0">
+                <a:latin typeface="Arial" panose="020B0604020202020204" pitchFamily="34" charset="0"/>
+                <a:cs typeface="Arial" panose="020B0604020202020204" pitchFamily="34" charset="0"/>
+              </a:rPr>
+              <a:t> (ratings, reviewer ID, timestamps) and </a:t>
+            </a:r>
+            <a:r>
+              <a:rPr lang="en-US" b="1" dirty="0" smtClean="0">
+                <a:latin typeface="Arial" panose="020B0604020202020204" pitchFamily="34" charset="0"/>
+                <a:cs typeface="Arial" panose="020B0604020202020204" pitchFamily="34" charset="0"/>
+              </a:rPr>
+              <a:t>unstructured data</a:t>
+            </a:r>
+            <a:r>
+              <a:rPr lang="en-US" dirty="0" smtClean="0">
+                <a:latin typeface="Arial" panose="020B0604020202020204" pitchFamily="34" charset="0"/>
+                <a:cs typeface="Arial" panose="020B0604020202020204" pitchFamily="34" charset="0"/>
+              </a:rPr>
+              <a:t> (review text), enabling comprehensive analysis using both statistical and NLP techniques.</a:t>
             </a:r>
           </a:p>
           <a:p>
             <a:pPr algn="just"/>
             <a:r>
-              <a:rPr lang="en-US" dirty="0"/>
-              <a:t>Includes structured + unstructured </a:t>
-            </a:r>
-            <a:r>
-              <a:rPr lang="en-US" dirty="0" smtClean="0"/>
-              <a:t>data</a:t>
-            </a:r>
-          </a:p>
-          <a:p>
-            <a:pPr algn="just"/>
-            <a:r>
-              <a:rPr lang="en-US" dirty="0"/>
-              <a:t>Enables better control and feature design</a:t>
+              <a:rPr lang="en-US" dirty="0" smtClean="0">
+                <a:latin typeface="Arial" panose="020B0604020202020204" pitchFamily="34" charset="0"/>
+                <a:cs typeface="Arial" panose="020B0604020202020204" pitchFamily="34" charset="0"/>
+              </a:rPr>
+              <a:t>This controlled dataset allows better feature engineering, balanced class distribution, and improved model performance.</a:t>
             </a:r>
             <a:endParaRPr lang="en-US" dirty="0">
               <a:latin typeface="Arial" panose="020B0604020202020204" pitchFamily="34" charset="0"/>
@@ -16868,14 +17227,14 @@
           <a:p>
             <a:r>
               <a:rPr lang="en-US" b="1" dirty="0">
-                <a:latin typeface="Century Gothic (Body)"/>
+                <a:latin typeface="Arial" panose="020B0604020202020204" pitchFamily="34" charset="0"/>
                 <a:cs typeface="Arial" panose="020B0604020202020204" pitchFamily="34" charset="0"/>
               </a:rPr>
               <a:t>Review Text</a:t>
             </a:r>
             <a:r>
               <a:rPr lang="en-US" dirty="0">
-                <a:latin typeface="Century Gothic (Body)"/>
+                <a:latin typeface="Arial" panose="020B0604020202020204" pitchFamily="34" charset="0"/>
                 <a:cs typeface="Arial" panose="020B0604020202020204" pitchFamily="34" charset="0"/>
               </a:rPr>
               <a:t> – Main textual content of the review </a:t>
@@ -16884,14 +17243,14 @@
           <a:p>
             <a:r>
               <a:rPr lang="en-US" b="1" dirty="0">
-                <a:latin typeface="Century Gothic (Body)"/>
+                <a:latin typeface="Arial" panose="020B0604020202020204" pitchFamily="34" charset="0"/>
                 <a:cs typeface="Arial" panose="020B0604020202020204" pitchFamily="34" charset="0"/>
               </a:rPr>
               <a:t>Label</a:t>
             </a:r>
             <a:r>
               <a:rPr lang="en-US" dirty="0">
-                <a:latin typeface="Century Gothic (Body)"/>
+                <a:latin typeface="Arial" panose="020B0604020202020204" pitchFamily="34" charset="0"/>
                 <a:cs typeface="Arial" panose="020B0604020202020204" pitchFamily="34" charset="0"/>
               </a:rPr>
               <a:t> – Indicates whether review is Fake (1) or Genuine (0) </a:t>
@@ -16900,14 +17259,14 @@
           <a:p>
             <a:r>
               <a:rPr lang="en-US" b="1" dirty="0">
-                <a:latin typeface="Century Gothic (Body)"/>
+                <a:latin typeface="Arial" panose="020B0604020202020204" pitchFamily="34" charset="0"/>
                 <a:cs typeface="Arial" panose="020B0604020202020204" pitchFamily="34" charset="0"/>
               </a:rPr>
               <a:t>Rating</a:t>
             </a:r>
             <a:r>
               <a:rPr lang="en-US" dirty="0">
-                <a:latin typeface="Century Gothic (Body)"/>
+                <a:latin typeface="Arial" panose="020B0604020202020204" pitchFamily="34" charset="0"/>
                 <a:cs typeface="Arial" panose="020B0604020202020204" pitchFamily="34" charset="0"/>
               </a:rPr>
               <a:t> – Numerical value (1 to 5 stars) </a:t>
@@ -16916,14 +17275,14 @@
           <a:p>
             <a:r>
               <a:rPr lang="en-US" b="1" dirty="0">
-                <a:latin typeface="Century Gothic (Body)"/>
+                <a:latin typeface="Arial" panose="020B0604020202020204" pitchFamily="34" charset="0"/>
                 <a:cs typeface="Arial" panose="020B0604020202020204" pitchFamily="34" charset="0"/>
               </a:rPr>
               <a:t>Reviewer ID</a:t>
             </a:r>
             <a:r>
               <a:rPr lang="en-US" dirty="0">
-                <a:latin typeface="Century Gothic (Body)"/>
+                <a:latin typeface="Arial" panose="020B0604020202020204" pitchFamily="34" charset="0"/>
                 <a:cs typeface="Arial" panose="020B0604020202020204" pitchFamily="34" charset="0"/>
               </a:rPr>
               <a:t> – Unique identifier for each user </a:t>
@@ -16932,14 +17291,14 @@
           <a:p>
             <a:r>
               <a:rPr lang="en-US" b="1" dirty="0">
-                <a:latin typeface="Century Gothic (Body)"/>
+                <a:latin typeface="Arial" panose="020B0604020202020204" pitchFamily="34" charset="0"/>
                 <a:cs typeface="Arial" panose="020B0604020202020204" pitchFamily="34" charset="0"/>
               </a:rPr>
               <a:t>Timestamp</a:t>
             </a:r>
             <a:r>
               <a:rPr lang="en-US" dirty="0">
-                <a:latin typeface="Century Gothic (Body)"/>
+                <a:latin typeface="Arial" panose="020B0604020202020204" pitchFamily="34" charset="0"/>
                 <a:cs typeface="Arial" panose="020B0604020202020204" pitchFamily="34" charset="0"/>
               </a:rPr>
               <a:t> – Time when the review was posted </a:t>
@@ -16951,21 +17310,21 @@
             </a:pPr>
             <a:r>
               <a:rPr lang="en-US" dirty="0">
-                <a:latin typeface="Century Gothic (Body)"/>
+                <a:latin typeface="Arial" panose="020B0604020202020204" pitchFamily="34" charset="0"/>
                 <a:cs typeface="Arial" panose="020B0604020202020204" pitchFamily="34" charset="0"/>
               </a:rPr>
               <a:t>These attributes help in analyzing both </a:t>
             </a:r>
             <a:r>
               <a:rPr lang="en-US" b="1" dirty="0">
-                <a:latin typeface="Century Gothic (Body)"/>
+                <a:latin typeface="Arial" panose="020B0604020202020204" pitchFamily="34" charset="0"/>
                 <a:cs typeface="Arial" panose="020B0604020202020204" pitchFamily="34" charset="0"/>
               </a:rPr>
               <a:t>content-based and behavior-based patterns</a:t>
             </a:r>
             <a:r>
               <a:rPr lang="en-US" dirty="0">
-                <a:latin typeface="Century Gothic (Body)"/>
+                <a:latin typeface="Arial" panose="020B0604020202020204" pitchFamily="34" charset="0"/>
                 <a:cs typeface="Arial" panose="020B0604020202020204" pitchFamily="34" charset="0"/>
               </a:rPr>
               <a:t> in reviews.</a:t>
@@ -17014,10 +17373,8 @@
           <a:lstStyle/>
           <a:p>
             <a:r>
-              <a:rPr lang="en-US" dirty="0" smtClean="0"/>
-              <a:t>Features</a:t>
-            </a:r>
-            <a:endParaRPr lang="en-US" dirty="0"/>
+              <a:t>Data Preprocessing</a:t>
+            </a:r>
           </a:p>
         </p:txBody>
       </p:sp>
@@ -17033,79 +17390,85 @@
         </p:nvSpPr>
         <p:spPr>
           <a:xfrm>
-            <a:off x="554182" y="2489200"/>
-            <a:ext cx="8091054" cy="3530600"/>
+            <a:off x="498764" y="2489200"/>
+            <a:ext cx="7989454" cy="3530600"/>
           </a:xfrm>
         </p:spPr>
         <p:txBody>
           <a:bodyPr/>
           <a:lstStyle/>
           <a:p>
-            <a:r>
-              <a:rPr lang="en-US" b="1" dirty="0">
-                <a:latin typeface="Century Gothic (Body)"/>
-                <a:cs typeface="Arial" panose="020B0604020202020204" pitchFamily="34" charset="0"/>
-              </a:rPr>
-              <a:t>Word Count</a:t>
-            </a:r>
+            <a:pPr algn="just"/>
             <a:r>
               <a:rPr lang="en-US" dirty="0">
-                <a:latin typeface="Century Gothic (Body)"/>
-                <a:cs typeface="Arial" panose="020B0604020202020204" pitchFamily="34" charset="0"/>
-              </a:rPr>
-              <a:t> – Measures length of the review </a:t>
-            </a:r>
-          </a:p>
-          <a:p>
-            <a:r>
-              <a:rPr lang="en-US" b="1" dirty="0">
-                <a:latin typeface="Century Gothic (Body)"/>
-                <a:cs typeface="Arial" panose="020B0604020202020204" pitchFamily="34" charset="0"/>
-              </a:rPr>
-              <a:t>N-grams</a:t>
+                <a:latin typeface="Arial" panose="020B0604020202020204" pitchFamily="34" charset="0"/>
+                <a:cs typeface="Arial" panose="020B0604020202020204" pitchFamily="34" charset="0"/>
+              </a:rPr>
+              <a:t>Removal of noise such as punctuation, special characters, and </a:t>
+            </a:r>
+            <a:r>
+              <a:rPr lang="en-US" dirty="0" err="1">
+                <a:latin typeface="Arial" panose="020B0604020202020204" pitchFamily="34" charset="0"/>
+                <a:cs typeface="Arial" panose="020B0604020202020204" pitchFamily="34" charset="0"/>
+              </a:rPr>
+              <a:t>stopwords</a:t>
             </a:r>
             <a:r>
               <a:rPr lang="en-US" dirty="0">
-                <a:latin typeface="Century Gothic (Body)"/>
-                <a:cs typeface="Arial" panose="020B0604020202020204" pitchFamily="34" charset="0"/>
-              </a:rPr>
-              <a:t> – Captures sequences of words and writing patterns </a:t>
-            </a:r>
-          </a:p>
-          <a:p>
-            <a:r>
-              <a:rPr lang="en-US" b="1" dirty="0">
-                <a:latin typeface="Century Gothic (Body)"/>
-                <a:cs typeface="Arial" panose="020B0604020202020204" pitchFamily="34" charset="0"/>
-              </a:rPr>
-              <a:t>TF-IDF</a:t>
-            </a:r>
+                <a:latin typeface="Arial" panose="020B0604020202020204" pitchFamily="34" charset="0"/>
+                <a:cs typeface="Arial" panose="020B0604020202020204" pitchFamily="34" charset="0"/>
+              </a:rPr>
+              <a:t> </a:t>
+            </a:r>
+          </a:p>
+          <a:p>
+            <a:pPr algn="just"/>
             <a:r>
               <a:rPr lang="en-US" dirty="0">
-                <a:latin typeface="Century Gothic (Body)"/>
-                <a:cs typeface="Arial" panose="020B0604020202020204" pitchFamily="34" charset="0"/>
-              </a:rPr>
-              <a:t> – Converts text into numerical form based on word importance </a:t>
-            </a:r>
-            <a:endParaRPr lang="en-US" dirty="0" smtClean="0">
-              <a:latin typeface="Century Gothic (Body)"/>
-              <a:cs typeface="Arial" panose="020B0604020202020204" pitchFamily="34" charset="0"/>
-            </a:endParaRPr>
-          </a:p>
-          <a:p>
-            <a:r>
-              <a:rPr lang="en-US" b="1" dirty="0">
-                <a:latin typeface="Century Gothic (Body)"/>
-                <a:cs typeface="Arial" panose="020B0604020202020204" pitchFamily="34" charset="0"/>
-              </a:rPr>
-              <a:t>Sentiment Scores</a:t>
-            </a:r>
+                <a:latin typeface="Arial" panose="020B0604020202020204" pitchFamily="34" charset="0"/>
+                <a:cs typeface="Arial" panose="020B0604020202020204" pitchFamily="34" charset="0"/>
+              </a:rPr>
+              <a:t>Conversion of text to lowercase for uniformity </a:t>
+            </a:r>
+          </a:p>
+          <a:p>
+            <a:pPr algn="just"/>
             <a:r>
               <a:rPr lang="en-US" dirty="0">
-                <a:latin typeface="Century Gothic (Body)"/>
-                <a:cs typeface="Arial" panose="020B0604020202020204" pitchFamily="34" charset="0"/>
-              </a:rPr>
-              <a:t> using VADER (positive, negative, neutral, compound) </a:t>
+                <a:latin typeface="Arial" panose="020B0604020202020204" pitchFamily="34" charset="0"/>
+                <a:cs typeface="Arial" panose="020B0604020202020204" pitchFamily="34" charset="0"/>
+              </a:rPr>
+              <a:t>Tokenization to split text into individual words </a:t>
+            </a:r>
+          </a:p>
+          <a:p>
+            <a:pPr algn="just"/>
+            <a:r>
+              <a:rPr lang="en-US" dirty="0">
+                <a:latin typeface="Arial" panose="020B0604020202020204" pitchFamily="34" charset="0"/>
+                <a:cs typeface="Arial" panose="020B0604020202020204" pitchFamily="34" charset="0"/>
+              </a:rPr>
+              <a:t>Lemmatization to reduce words to their base form </a:t>
+            </a:r>
+          </a:p>
+          <a:p>
+            <a:pPr algn="just"/>
+            <a:r>
+              <a:rPr lang="en-US" dirty="0">
+                <a:latin typeface="Arial" panose="020B0604020202020204" pitchFamily="34" charset="0"/>
+                <a:cs typeface="Arial" panose="020B0604020202020204" pitchFamily="34" charset="0"/>
+              </a:rPr>
+              <a:t>Handling missing values to ensure data consistency </a:t>
+            </a:r>
+          </a:p>
+          <a:p>
+            <a:pPr algn="just"/>
+            <a:r>
+              <a:rPr lang="en-US" dirty="0">
+                <a:latin typeface="Arial" panose="020B0604020202020204" pitchFamily="34" charset="0"/>
+                <a:cs typeface="Arial" panose="020B0604020202020204" pitchFamily="34" charset="0"/>
+              </a:rPr>
+              <a:t>Encoding categorical data into numerical format </a:t>
             </a:r>
           </a:p>
           <a:p>
@@ -17113,28 +17476,16 @@
               <a:buNone/>
             </a:pPr>
             <a:r>
-              <a:rPr lang="en-US" dirty="0" smtClean="0">
-                <a:latin typeface="Century Gothic (Body)"/>
-                <a:cs typeface="Arial" panose="020B0604020202020204" pitchFamily="34" charset="0"/>
-              </a:rPr>
-              <a:t>These </a:t>
-            </a:r>
-            <a:r>
               <a:rPr lang="en-US" dirty="0">
-                <a:latin typeface="Century Gothic (Body)"/>
-                <a:cs typeface="Arial" panose="020B0604020202020204" pitchFamily="34" charset="0"/>
-              </a:rPr>
-              <a:t>features help in identifying patterns such as repetitive phrases, exaggerated language, and unnatural writing styles commonly found in fake reviews.</a:t>
+                <a:latin typeface="Arial" panose="020B0604020202020204" pitchFamily="34" charset="0"/>
+                <a:cs typeface="Arial" panose="020B0604020202020204" pitchFamily="34" charset="0"/>
+              </a:rPr>
+              <a:t>Preprocessing improves data quality and prepares it for feature extraction and model training.</a:t>
             </a:r>
           </a:p>
         </p:txBody>
       </p:sp>
     </p:spTree>
-    <p:extLst>
-      <p:ext uri="{BB962C8B-B14F-4D97-AF65-F5344CB8AC3E}">
-        <p14:creationId xmlns:p14="http://schemas.microsoft.com/office/powerpoint/2010/main" val="7445872"/>
-      </p:ext>
-    </p:extLst>
   </p:cSld>
   <p:clrMapOvr>
     <a:masterClrMapping/>
@@ -17175,7 +17526,7 @@
           <a:lstStyle/>
           <a:p>
             <a:r>
-              <a:t>Data Preprocessing</a:t>
+              <a:t>Feature Extraction</a:t>
             </a:r>
           </a:p>
         </p:txBody>
@@ -17192,97 +17543,110 @@
         </p:nvSpPr>
         <p:spPr>
           <a:xfrm>
-            <a:off x="498764" y="2489200"/>
-            <a:ext cx="7989454" cy="3530600"/>
+            <a:off x="554183" y="2489200"/>
+            <a:ext cx="8063344" cy="3530600"/>
           </a:xfrm>
         </p:spPr>
         <p:txBody>
-          <a:bodyPr/>
+          <a:bodyPr>
+            <a:normAutofit/>
+          </a:bodyPr>
           <a:lstStyle/>
           <a:p>
             <a:pPr algn="just"/>
             <a:r>
+              <a:rPr lang="en-US" b="1" dirty="0">
+                <a:latin typeface="Arial" panose="020B0604020202020204" pitchFamily="34" charset="0"/>
+                <a:cs typeface="Arial" panose="020B0604020202020204" pitchFamily="34" charset="0"/>
+              </a:rPr>
+              <a:t>TF-IDF (Term Frequency–Inverse Document Frequency)</a:t>
+            </a:r>
+            <a:r>
               <a:rPr lang="en-US" dirty="0">
                 <a:latin typeface="Arial" panose="020B0604020202020204" pitchFamily="34" charset="0"/>
                 <a:cs typeface="Arial" panose="020B0604020202020204" pitchFamily="34" charset="0"/>
               </a:rPr>
-              <a:t>Removal of noise such as punctuation, special characters, and </a:t>
-            </a:r>
-            <a:r>
-              <a:rPr lang="en-US" dirty="0" err="1">
-                <a:latin typeface="Arial" panose="020B0604020202020204" pitchFamily="34" charset="0"/>
-                <a:cs typeface="Arial" panose="020B0604020202020204" pitchFamily="34" charset="0"/>
-              </a:rPr>
-              <a:t>stopwords</a:t>
+              <a:t> for converting text into numerical vectors </a:t>
+            </a:r>
+          </a:p>
+          <a:p>
+            <a:pPr algn="just"/>
+            <a:r>
+              <a:rPr lang="en-US" b="1" dirty="0">
+                <a:latin typeface="Arial" panose="020B0604020202020204" pitchFamily="34" charset="0"/>
+                <a:cs typeface="Arial" panose="020B0604020202020204" pitchFamily="34" charset="0"/>
+              </a:rPr>
+              <a:t>N-grams (unigrams + bigrams)</a:t>
             </a:r>
             <a:r>
               <a:rPr lang="en-US" dirty="0">
                 <a:latin typeface="Arial" panose="020B0604020202020204" pitchFamily="34" charset="0"/>
                 <a:cs typeface="Arial" panose="020B0604020202020204" pitchFamily="34" charset="0"/>
               </a:rPr>
-              <a:t> </a:t>
+              <a:t> to capture word sequences and writing patterns </a:t>
             </a:r>
           </a:p>
           <a:p>
             <a:pPr algn="just"/>
             <a:r>
+              <a:rPr lang="en-US" b="1" dirty="0">
+                <a:latin typeface="Arial" panose="020B0604020202020204" pitchFamily="34" charset="0"/>
+                <a:cs typeface="Arial" panose="020B0604020202020204" pitchFamily="34" charset="0"/>
+              </a:rPr>
+              <a:t>Review Length</a:t>
+            </a:r>
+            <a:r>
               <a:rPr lang="en-US" dirty="0">
                 <a:latin typeface="Arial" panose="020B0604020202020204" pitchFamily="34" charset="0"/>
                 <a:cs typeface="Arial" panose="020B0604020202020204" pitchFamily="34" charset="0"/>
               </a:rPr>
-              <a:t>Conversion of text to lowercase for uniformity </a:t>
+              <a:t> as a statistical feature </a:t>
             </a:r>
           </a:p>
           <a:p>
             <a:pPr algn="just"/>
             <a:r>
+              <a:rPr lang="en-US" b="1" dirty="0">
+                <a:latin typeface="Arial" panose="020B0604020202020204" pitchFamily="34" charset="0"/>
+                <a:cs typeface="Arial" panose="020B0604020202020204" pitchFamily="34" charset="0"/>
+              </a:rPr>
+              <a:t>Sentiment Scores</a:t>
+            </a:r>
+            <a:r>
               <a:rPr lang="en-US" dirty="0">
                 <a:latin typeface="Arial" panose="020B0604020202020204" pitchFamily="34" charset="0"/>
                 <a:cs typeface="Arial" panose="020B0604020202020204" pitchFamily="34" charset="0"/>
               </a:rPr>
-              <a:t>Tokenization to split text into individual words </a:t>
+              <a:t> using VADER (positive, negative, neutral, compound) </a:t>
             </a:r>
           </a:p>
           <a:p>
             <a:pPr algn="just"/>
             <a:r>
+              <a:rPr lang="en-US" b="1" dirty="0">
+                <a:latin typeface="Arial" panose="020B0604020202020204" pitchFamily="34" charset="0"/>
+                <a:cs typeface="Arial" panose="020B0604020202020204" pitchFamily="34" charset="0"/>
+              </a:rPr>
+              <a:t>Behavioral Features</a:t>
+            </a:r>
+            <a:r>
               <a:rPr lang="en-US" dirty="0">
                 <a:latin typeface="Arial" panose="020B0604020202020204" pitchFamily="34" charset="0"/>
                 <a:cs typeface="Arial" panose="020B0604020202020204" pitchFamily="34" charset="0"/>
               </a:rPr>
-              <a:t>Lemmatization to reduce words to their base form </a:t>
-            </a:r>
-          </a:p>
-          <a:p>
-            <a:pPr algn="just"/>
+              <a:t> such as review frequency, duplication, and rating patterns </a:t>
+            </a:r>
+          </a:p>
+          <a:p>
+            <a:pPr marL="0" indent="0" algn="just">
+              <a:buNone/>
+            </a:pPr>
             <a:r>
               <a:rPr lang="en-US" dirty="0">
                 <a:latin typeface="Arial" panose="020B0604020202020204" pitchFamily="34" charset="0"/>
                 <a:cs typeface="Arial" panose="020B0604020202020204" pitchFamily="34" charset="0"/>
               </a:rPr>
-              <a:t>Handling missing values to ensure data consistency </a:t>
-            </a:r>
-          </a:p>
-          <a:p>
-            <a:pPr algn="just"/>
-            <a:r>
-              <a:rPr lang="en-US" dirty="0">
-                <a:latin typeface="Arial" panose="020B0604020202020204" pitchFamily="34" charset="0"/>
-                <a:cs typeface="Arial" panose="020B0604020202020204" pitchFamily="34" charset="0"/>
-              </a:rPr>
-              <a:t>Encoding categorical data into numerical format </a:t>
-            </a:r>
-          </a:p>
-          <a:p>
-            <a:pPr marL="0" indent="0" algn="just">
-              <a:buNone/>
-            </a:pPr>
-            <a:r>
-              <a:rPr lang="en-US" dirty="0">
-                <a:latin typeface="Arial" panose="020B0604020202020204" pitchFamily="34" charset="0"/>
-                <a:cs typeface="Arial" panose="020B0604020202020204" pitchFamily="34" charset="0"/>
-              </a:rPr>
-              <a:t>Preprocessing improves data quality and prepares it for feature extraction and model training.</a:t>
+              <a:t>A hybrid combination of features improves model performance and detection accuracy.</a:t>
             </a:r>
           </a:p>
         </p:txBody>
